--- a/docs/OpenEMR-ovozli-yozuv.pptx
+++ b/docs/OpenEMR-ovozli-yozuv.pptx
@@ -11,10 +11,6 @@
     <p:sldId id="259" r:id="rId10"/>
     <p:sldId id="260" r:id="rId11"/>
     <p:sldId id="261" r:id="rId12"/>
-    <p:sldId id="262" r:id="rId13"/>
-    <p:sldId id="263" r:id="rId14"/>
-    <p:sldId id="264" r:id="rId15"/>
-    <p:sldId id="265" r:id="rId16"/>
   </p:sldIdLst>
   <p:sldSz cx="12191695" cy="6858000" type="screen4x3"/>
   <p:notesSz cx="6858000" cy="9144000"/>
@@ -3149,8 +3145,8 @@
         </p:nvSpPr>
         <p:spPr>
           <a:xfrm>
-            <a:off x="777240" y="2057400"/>
-            <a:ext cx="10607040" cy="457200"/>
+            <a:off x="777240" y="2103120"/>
+            <a:ext cx="10607040" cy="365760"/>
           </a:xfrm>
           <a:prstGeom prst="rect">
             <a:avLst/>
@@ -3165,7 +3161,7 @@
           <a:p>
             <a:pPr algn="l">
               <a:spcAft>
-                <a:spcPts val="600"/>
+                <a:spcPts val="700"/>
               </a:spcAft>
             </a:pPr>
             <a:r>
@@ -3188,8 +3184,8 @@
         </p:nvSpPr>
         <p:spPr>
           <a:xfrm>
-            <a:off x="777240" y="2514600"/>
-            <a:ext cx="10607040" cy="1280160"/>
+            <a:off x="777240" y="2560320"/>
+            <a:ext cx="10607040" cy="1188720"/>
           </a:xfrm>
           <a:prstGeom prst="rect">
             <a:avLst/>
@@ -3204,7 +3200,7 @@
           <a:p>
             <a:pPr algn="l">
               <a:spcAft>
-                <a:spcPts val="600"/>
+                <a:spcPts val="700"/>
               </a:spcAft>
             </a:pPr>
             <a:r>
@@ -3227,8 +3223,8 @@
         </p:nvSpPr>
         <p:spPr>
           <a:xfrm>
-            <a:off x="777240" y="3794760"/>
-            <a:ext cx="9601200" cy="1097280"/>
+            <a:off x="777240" y="3840480"/>
+            <a:ext cx="9601200" cy="1005840"/>
           </a:xfrm>
           <a:prstGeom prst="rect">
             <a:avLst/>
@@ -3243,7 +3239,7 @@
           <a:p>
             <a:pPr algn="l">
               <a:spcAft>
-                <a:spcPts val="600"/>
+                <a:spcPts val="700"/>
               </a:spcAft>
             </a:pPr>
             <a:r>
@@ -3259,7 +3255,7 @@
           <a:p>
             <a:pPr algn="l">
               <a:spcAft>
-                <a:spcPts val="600"/>
+                <a:spcPts val="700"/>
               </a:spcAft>
             </a:pPr>
             <a:r>
@@ -3282,7 +3278,7 @@
         </p:nvSpPr>
         <p:spPr>
           <a:xfrm>
-            <a:off x="777240" y="5760720"/>
+            <a:off x="777240" y="5806440"/>
             <a:ext cx="10607040" cy="365760"/>
           </a:xfrm>
           <a:prstGeom prst="rect">
@@ -3298,7 +3294,7 @@
           <a:p>
             <a:pPr algn="l">
               <a:spcAft>
-                <a:spcPts val="600"/>
+                <a:spcPts val="700"/>
               </a:spcAft>
             </a:pPr>
             <a:r>
@@ -3309,201 +3305,6 @@
                 <a:latin typeface="Helvetica Neue"/>
               </a:rPr>
               <a:t>Tohirjon Vohidov</a:t>
-            </a:r>
-          </a:p>
-        </p:txBody>
-      </p:sp>
-    </p:spTree>
-  </p:cSld>
-  <p:clrMapOvr>
-    <a:masterClrMapping/>
-  </p:clrMapOvr>
-</p:sld>
-</file>
-
-<file path=ppt/slides/slide10.xml><?xml version="1.0" encoding="utf-8"?>
-<p:sld xmlns:a="http://schemas.openxmlformats.org/drawingml/2006/main" xmlns:p="http://schemas.openxmlformats.org/presentationml/2006/main" xmlns:r="http://schemas.openxmlformats.org/officeDocument/2006/relationships">
-  <p:cSld>
-    <p:spTree>
-      <p:nvGrpSpPr>
-        <p:cNvPr id="1" name=""/>
-        <p:cNvGrpSpPr/>
-        <p:nvPr/>
-      </p:nvGrpSpPr>
-      <p:grpSpPr/>
-      <p:sp>
-        <p:nvSpPr>
-          <p:cNvPr id="2" name="Rectangle 1"/>
-          <p:cNvSpPr/>
-          <p:nvPr/>
-        </p:nvSpPr>
-        <p:spPr>
-          <a:xfrm>
-            <a:off x="0" y="0"/>
-            <a:ext cx="12191695" cy="6858000"/>
-          </a:xfrm>
-          <a:prstGeom prst="rect">
-            <a:avLst/>
-          </a:prstGeom>
-          <a:solidFill>
-            <a:srgbClr val="F6F7F4"/>
-          </a:solidFill>
-          <a:ln>
-            <a:noFill/>
-          </a:ln>
-          <a:effectLst/>
-        </p:spPr>
-        <p:style>
-          <a:lnRef idx="1">
-            <a:schemeClr val="accent1"/>
-          </a:lnRef>
-          <a:fillRef idx="3">
-            <a:schemeClr val="accent1"/>
-          </a:fillRef>
-          <a:effectRef idx="2">
-            <a:schemeClr val="accent1"/>
-          </a:effectRef>
-          <a:fontRef idx="minor">
-            <a:schemeClr val="lt1"/>
-          </a:fontRef>
-        </p:style>
-        <p:txBody>
-          <a:bodyPr rtlCol="0" anchor="ctr"/>
-          <a:lstStyle/>
-          <a:p>
-            <a:pPr algn="ctr"/>
-          </a:p>
-        </p:txBody>
-      </p:sp>
-      <p:sp>
-        <p:nvSpPr>
-          <p:cNvPr id="3" name="TextBox 2"/>
-          <p:cNvSpPr txBox="1"/>
-          <p:nvPr/>
-        </p:nvSpPr>
-        <p:spPr>
-          <a:xfrm>
-            <a:off x="777240" y="2377440"/>
-            <a:ext cx="10607040" cy="914400"/>
-          </a:xfrm>
-          <a:prstGeom prst="rect">
-            <a:avLst/>
-          </a:prstGeom>
-          <a:noFill/>
-        </p:spPr>
-        <p:txBody>
-          <a:bodyPr wrap="square" lIns="0" rIns="0" tIns="0" bIns="0">
-            <a:spAutoFit/>
-          </a:bodyPr>
-          <a:lstStyle/>
-          <a:p>
-            <a:pPr algn="l">
-              <a:spcAft>
-                <a:spcPts val="600"/>
-              </a:spcAft>
-            </a:pPr>
-            <a:r>
-              <a:rPr sz="4000" b="1">
-                <a:solidFill>
-                  <a:srgbClr val="131E19"/>
-                </a:solidFill>
-                <a:latin typeface="Helvetica Neue"/>
-              </a:rPr>
-              <a:t>Ishlaydigan tizim, o'lchangan natija</a:t>
-            </a:r>
-          </a:p>
-        </p:txBody>
-      </p:sp>
-      <p:sp>
-        <p:nvSpPr>
-          <p:cNvPr id="4" name="TextBox 3"/>
-          <p:cNvSpPr txBox="1"/>
-          <p:nvPr/>
-        </p:nvSpPr>
-        <p:spPr>
-          <a:xfrm>
-            <a:off x="777240" y="3566160"/>
-            <a:ext cx="10058400" cy="1463040"/>
-          </a:xfrm>
-          <a:prstGeom prst="rect">
-            <a:avLst/>
-          </a:prstGeom>
-          <a:noFill/>
-        </p:spPr>
-        <p:txBody>
-          <a:bodyPr wrap="square" lIns="0" rIns="0" tIns="0" bIns="0">
-            <a:spAutoFit/>
-          </a:bodyPr>
-          <a:lstStyle/>
-          <a:p>
-            <a:pPr algn="l">
-              <a:spcAft>
-                <a:spcPts val="600"/>
-              </a:spcAft>
-            </a:pPr>
-            <a:r>
-              <a:rPr sz="2200" b="0">
-                <a:solidFill>
-                  <a:srgbClr val="6E7D76"/>
-                </a:solidFill>
-                <a:latin typeface="Helvetica Neue"/>
-              </a:rPr>
-              <a:t>Ovozdan formagacha bo'lgan butun yo'l tayyor.</a:t>
-            </a:r>
-          </a:p>
-          <a:p>
-            <a:pPr algn="l">
-              <a:spcAft>
-                <a:spcPts val="600"/>
-              </a:spcAft>
-            </a:pPr>
-            <a:r>
-              <a:rPr sz="2200" b="0">
-                <a:solidFill>
-                  <a:srgbClr val="6E7D76"/>
-                </a:solidFill>
-                <a:latin typeface="Helvetica Neue"/>
-              </a:rPr>
-              <a:t>Dori nomlarini tanish 62 dan 88 foizga ko'tarildi, modelning o'zi o'zgarmasdan.</a:t>
-            </a:r>
-          </a:p>
-        </p:txBody>
-      </p:sp>
-      <p:sp>
-        <p:nvSpPr>
-          <p:cNvPr id="5" name="TextBox 4"/>
-          <p:cNvSpPr txBox="1"/>
-          <p:nvPr/>
-        </p:nvSpPr>
-        <p:spPr>
-          <a:xfrm>
-            <a:off x="777240" y="5760720"/>
-            <a:ext cx="10607040" cy="365760"/>
-          </a:xfrm>
-          <a:prstGeom prst="rect">
-            <a:avLst/>
-          </a:prstGeom>
-          <a:noFill/>
-        </p:spPr>
-        <p:txBody>
-          <a:bodyPr wrap="square" lIns="0" rIns="0" tIns="0" bIns="0">
-            <a:spAutoFit/>
-          </a:bodyPr>
-          <a:lstStyle/>
-          <a:p>
-            <a:pPr algn="l">
-              <a:spcAft>
-                <a:spcPts val="600"/>
-              </a:spcAft>
-            </a:pPr>
-            <a:r>
-              <a:rPr sz="1500" b="1">
-                <a:solidFill>
-                  <a:srgbClr val="0E6B58"/>
-                </a:solidFill>
-                <a:latin typeface="Helvetica Neue"/>
-              </a:rPr>
-              <a:t>github.com/VohidovTohirjon/voice-to-text-openemr</a:t>
             </a:r>
           </a:p>
         </p:txBody>
@@ -3578,7 +3379,7 @@
         </p:nvSpPr>
         <p:spPr>
           <a:xfrm>
-            <a:off x="777240" y="548640"/>
+            <a:off x="777240" y="566928"/>
             <a:ext cx="10607040" cy="822960"/>
           </a:xfrm>
           <a:prstGeom prst="rect">
@@ -3594,17 +3395,17 @@
           <a:p>
             <a:pPr algn="l">
               <a:spcAft>
-                <a:spcPts val="600"/>
+                <a:spcPts val="700"/>
               </a:spcAft>
             </a:pPr>
             <a:r>
-              <a:rPr sz="3400" b="1">
+              <a:rPr sz="3300" b="1">
                 <a:solidFill>
                   <a:srgbClr val="131E19"/>
                 </a:solidFill>
                 <a:latin typeface="Helvetica Neue"/>
               </a:rPr>
-              <a:t>Nima qilindi</a:t>
+              <a:t>Natija</a:t>
             </a:r>
           </a:p>
         </p:txBody>
@@ -3617,7 +3418,7 @@
         </p:nvSpPr>
         <p:spPr>
           <a:xfrm>
-            <a:off x="777240" y="1298448"/>
+            <a:off x="777240" y="1316736"/>
             <a:ext cx="10607040" cy="548640"/>
           </a:xfrm>
           <a:prstGeom prst="rect">
@@ -3633,7 +3434,7 @@
           <a:p>
             <a:pPr algn="l">
               <a:spcAft>
-                <a:spcPts val="600"/>
+                <a:spcPts val="700"/>
               </a:spcAft>
             </a:pPr>
             <a:r>
@@ -3656,8 +3457,8 @@
         </p:nvSpPr>
         <p:spPr>
           <a:xfrm>
-            <a:off x="777240" y="2194560"/>
-            <a:ext cx="2468880" cy="1828800"/>
+            <a:off x="777240" y="2286000"/>
+            <a:ext cx="2468880" cy="1920240"/>
           </a:xfrm>
           <a:prstGeom prst="roundRect">
             <a:avLst/>
@@ -3702,8 +3503,8 @@
         </p:nvSpPr>
         <p:spPr>
           <a:xfrm>
-            <a:off x="777240" y="2194560"/>
-            <a:ext cx="64008" cy="1828800"/>
+            <a:off x="777240" y="2286000"/>
+            <a:ext cx="64008" cy="1920240"/>
           </a:xfrm>
           <a:prstGeom prst="roundRect">
             <a:avLst/>
@@ -3746,7 +3547,7 @@
         </p:nvSpPr>
         <p:spPr>
           <a:xfrm>
-            <a:off x="1097280" y="2514600"/>
+            <a:off x="1124712" y="2633472"/>
             <a:ext cx="2011680" cy="731520"/>
           </a:xfrm>
           <a:prstGeom prst="rect">
@@ -3762,7 +3563,7 @@
           <a:p>
             <a:pPr algn="l">
               <a:spcAft>
-                <a:spcPts val="600"/>
+                <a:spcPts val="700"/>
               </a:spcAft>
             </a:pPr>
             <a:r>
@@ -3785,7 +3586,7 @@
         </p:nvSpPr>
         <p:spPr>
           <a:xfrm>
-            <a:off x="1097280" y="3246120"/>
+            <a:off x="1124712" y="3401568"/>
             <a:ext cx="2011680" cy="640080"/>
           </a:xfrm>
           <a:prstGeom prst="rect">
@@ -3801,7 +3602,7 @@
           <a:p>
             <a:pPr algn="l">
               <a:spcAft>
-                <a:spcPts val="600"/>
+                <a:spcPts val="700"/>
               </a:spcAft>
             </a:pPr>
             <a:r>
@@ -3824,8 +3625,8 @@
         </p:nvSpPr>
         <p:spPr>
           <a:xfrm>
-            <a:off x="3474720" y="2194560"/>
-            <a:ext cx="2468880" cy="1828800"/>
+            <a:off x="3474720" y="2286000"/>
+            <a:ext cx="2468880" cy="1920240"/>
           </a:xfrm>
           <a:prstGeom prst="roundRect">
             <a:avLst/>
@@ -3870,8 +3671,8 @@
         </p:nvSpPr>
         <p:spPr>
           <a:xfrm>
-            <a:off x="3474720" y="2194560"/>
-            <a:ext cx="64008" cy="1828800"/>
+            <a:off x="3474720" y="2286000"/>
+            <a:ext cx="64008" cy="1920240"/>
           </a:xfrm>
           <a:prstGeom prst="roundRect">
             <a:avLst/>
@@ -3914,7 +3715,7 @@
         </p:nvSpPr>
         <p:spPr>
           <a:xfrm>
-            <a:off x="3794760" y="2514600"/>
+            <a:off x="3822192" y="2633472"/>
             <a:ext cx="2011680" cy="731520"/>
           </a:xfrm>
           <a:prstGeom prst="rect">
@@ -3930,7 +3731,7 @@
           <a:p>
             <a:pPr algn="l">
               <a:spcAft>
-                <a:spcPts val="600"/>
+                <a:spcPts val="700"/>
               </a:spcAft>
             </a:pPr>
             <a:r>
@@ -3953,7 +3754,7 @@
         </p:nvSpPr>
         <p:spPr>
           <a:xfrm>
-            <a:off x="3794760" y="3246120"/>
+            <a:off x="3822192" y="3401568"/>
             <a:ext cx="2011680" cy="640080"/>
           </a:xfrm>
           <a:prstGeom prst="rect">
@@ -3969,7 +3770,7 @@
           <a:p>
             <a:pPr algn="l">
               <a:spcAft>
-                <a:spcPts val="600"/>
+                <a:spcPts val="700"/>
               </a:spcAft>
             </a:pPr>
             <a:r>
@@ -3992,8 +3793,8 @@
         </p:nvSpPr>
         <p:spPr>
           <a:xfrm>
-            <a:off x="6172200" y="2194560"/>
-            <a:ext cx="2468880" cy="1828800"/>
+            <a:off x="6172200" y="2286000"/>
+            <a:ext cx="2468880" cy="1920240"/>
           </a:xfrm>
           <a:prstGeom prst="roundRect">
             <a:avLst/>
@@ -4038,8 +3839,8 @@
         </p:nvSpPr>
         <p:spPr>
           <a:xfrm>
-            <a:off x="6172200" y="2194560"/>
-            <a:ext cx="64008" cy="1828800"/>
+            <a:off x="6172200" y="2286000"/>
+            <a:ext cx="64008" cy="1920240"/>
           </a:xfrm>
           <a:prstGeom prst="roundRect">
             <a:avLst/>
@@ -4082,7 +3883,7 @@
         </p:nvSpPr>
         <p:spPr>
           <a:xfrm>
-            <a:off x="6492240" y="2514600"/>
+            <a:off x="6519672" y="2633472"/>
             <a:ext cx="2011680" cy="731520"/>
           </a:xfrm>
           <a:prstGeom prst="rect">
@@ -4098,7 +3899,7 @@
           <a:p>
             <a:pPr algn="l">
               <a:spcAft>
-                <a:spcPts val="600"/>
+                <a:spcPts val="700"/>
               </a:spcAft>
             </a:pPr>
             <a:r>
@@ -4121,7 +3922,7 @@
         </p:nvSpPr>
         <p:spPr>
           <a:xfrm>
-            <a:off x="6492240" y="3246120"/>
+            <a:off x="6519672" y="3401568"/>
             <a:ext cx="2011680" cy="640080"/>
           </a:xfrm>
           <a:prstGeom prst="rect">
@@ -4137,7 +3938,7 @@
           <a:p>
             <a:pPr algn="l">
               <a:spcAft>
-                <a:spcPts val="600"/>
+                <a:spcPts val="700"/>
               </a:spcAft>
             </a:pPr>
             <a:r>
@@ -4160,8 +3961,8 @@
         </p:nvSpPr>
         <p:spPr>
           <a:xfrm>
-            <a:off x="8869680" y="2194560"/>
-            <a:ext cx="2468880" cy="1828800"/>
+            <a:off x="8869680" y="2286000"/>
+            <a:ext cx="2468880" cy="1920240"/>
           </a:xfrm>
           <a:prstGeom prst="roundRect">
             <a:avLst/>
@@ -4206,14 +4007,14 @@
         </p:nvSpPr>
         <p:spPr>
           <a:xfrm>
-            <a:off x="8869680" y="2194560"/>
-            <a:ext cx="64008" cy="1828800"/>
+            <a:off x="8869680" y="2286000"/>
+            <a:ext cx="64008" cy="1920240"/>
           </a:xfrm>
           <a:prstGeom prst="roundRect">
             <a:avLst/>
           </a:prstGeom>
           <a:solidFill>
-            <a:srgbClr val="A05007"/>
+            <a:srgbClr val="0E6B58"/>
           </a:solidFill>
           <a:ln>
             <a:noFill/>
@@ -4250,7 +4051,7 @@
         </p:nvSpPr>
         <p:spPr>
           <a:xfrm>
-            <a:off x="9189720" y="2514600"/>
+            <a:off x="9217152" y="2633472"/>
             <a:ext cx="2011680" cy="731520"/>
           </a:xfrm>
           <a:prstGeom prst="rect">
@@ -4266,13 +4067,13 @@
           <a:p>
             <a:pPr algn="l">
               <a:spcAft>
-                <a:spcPts val="600"/>
+                <a:spcPts val="700"/>
               </a:spcAft>
             </a:pPr>
             <a:r>
               <a:rPr sz="4000" b="1">
                 <a:solidFill>
-                  <a:srgbClr val="A05007"/>
+                  <a:srgbClr val="0E6B58"/>
                 </a:solidFill>
                 <a:latin typeface="Helvetica Neue"/>
               </a:rPr>
@@ -4289,7 +4090,7 @@
         </p:nvSpPr>
         <p:spPr>
           <a:xfrm>
-            <a:off x="9189720" y="3246120"/>
+            <a:off x="9217152" y="3401568"/>
             <a:ext cx="2011680" cy="640080"/>
           </a:xfrm>
           <a:prstGeom prst="rect">
@@ -4305,7 +4106,7 @@
           <a:p>
             <a:pPr algn="l">
               <a:spcAft>
-                <a:spcPts val="600"/>
+                <a:spcPts val="700"/>
               </a:spcAft>
             </a:pPr>
             <a:r>
@@ -4315,7 +4116,7 @@
                 </a:solidFill>
                 <a:latin typeface="Helvetica Neue"/>
               </a:rPr>
-              <a:t>ma'lumot bulutga chiqdi</a:t>
+              <a:t>bulutga yuborilgan ma'lumot</a:t>
             </a:r>
           </a:p>
         </p:txBody>
@@ -4328,8 +4129,8 @@
         </p:nvSpPr>
         <p:spPr>
           <a:xfrm>
-            <a:off x="777240" y="4617720"/>
-            <a:ext cx="10607040" cy="1463040"/>
+            <a:off x="777240" y="4846320"/>
+            <a:ext cx="10607040" cy="1280160"/>
           </a:xfrm>
           <a:prstGeom prst="rect">
             <a:avLst/>
@@ -4344,27 +4145,27 @@
           <a:p>
             <a:pPr algn="l">
               <a:spcAft>
-                <a:spcPts val="600"/>
+                <a:spcPts val="700"/>
               </a:spcAft>
             </a:pPr>
             <a:r>
-              <a:rPr sz="1900" b="0">
+              <a:rPr sz="2000" b="0">
                 <a:solidFill>
                   <a:srgbClr val="131E19"/>
                 </a:solidFill>
                 <a:latin typeface="Helvetica Neue"/>
               </a:rPr>
-              <a:t>SOAP bo'limlari, ko'rsatkichlar va tashxis kodi bir marta gapirishdan to'ldi.</a:t>
+              <a:t>SOAP bo'limlari, ko'rsatkichlar va tashxis kodi bir marta gapirishdan to'ladi.</a:t>
             </a:r>
           </a:p>
           <a:p>
             <a:pPr algn="l">
               <a:spcAft>
-                <a:spcPts val="600"/>
+                <a:spcPts val="700"/>
               </a:spcAft>
             </a:pPr>
             <a:r>
-              <a:rPr sz="1900" b="0">
+              <a:rPr sz="2000" b="0">
                 <a:solidFill>
                   <a:srgbClr val="131E19"/>
                 </a:solidFill>
@@ -4445,7 +4246,7 @@
         </p:nvSpPr>
         <p:spPr>
           <a:xfrm>
-            <a:off x="777240" y="548640"/>
+            <a:off x="777240" y="566928"/>
             <a:ext cx="10607040" cy="822960"/>
           </a:xfrm>
           <a:prstGeom prst="rect">
@@ -4461,17 +4262,17 @@
           <a:p>
             <a:pPr algn="l">
               <a:spcAft>
-                <a:spcPts val="600"/>
+                <a:spcPts val="700"/>
               </a:spcAft>
             </a:pPr>
             <a:r>
-              <a:rPr sz="3400" b="1">
+              <a:rPr sz="3300" b="1">
                 <a:solidFill>
                   <a:srgbClr val="131E19"/>
                 </a:solidFill>
                 <a:latin typeface="Helvetica Neue"/>
               </a:rPr>
-              <a:t>Arxitektura</a:t>
+              <a:t>Qanday ishlaydi</a:t>
             </a:r>
           </a:p>
         </p:txBody>
@@ -4492,8 +4293,8 @@
         </p:blipFill>
         <p:spPr>
           <a:xfrm>
-            <a:off x="2212847" y="1874519"/>
-            <a:ext cx="7735824" cy="4297680"/>
+            <a:off x="2295144" y="1874519"/>
+            <a:ext cx="7571231" cy="4206240"/>
           </a:xfrm>
           <a:prstGeom prst="rect">
             <a:avLst/>
@@ -4508,7 +4309,7 @@
         </p:nvSpPr>
         <p:spPr>
           <a:xfrm>
-            <a:off x="777240" y="6263640"/>
+            <a:off x="777240" y="6217920"/>
             <a:ext cx="10607040" cy="365760"/>
           </a:xfrm>
           <a:prstGeom prst="rect">
@@ -4524,17 +4325,17 @@
           <a:p>
             <a:pPr algn="l">
               <a:spcAft>
-                <a:spcPts val="600"/>
+                <a:spcPts val="700"/>
               </a:spcAft>
             </a:pPr>
             <a:r>
-              <a:rPr sz="1500" b="0">
+              <a:rPr sz="1600" b="0">
                 <a:solidFill>
                   <a:srgbClr val="6E7D76"/>
                 </a:solidFill>
                 <a:latin typeface="Helvetica Neue"/>
               </a:rPr>
-              <a:t>Uzuq chiziqdan tashqariga na ovoz, na matn chiqadi.</a:t>
+              <a:t>Ovoz ham, matn ham shu kompyuterdan chiqmaydi.</a:t>
             </a:r>
           </a:p>
         </p:txBody>
@@ -4609,7 +4410,7 @@
         </p:nvSpPr>
         <p:spPr>
           <a:xfrm>
-            <a:off x="777240" y="548640"/>
+            <a:off x="777240" y="566928"/>
             <a:ext cx="10607040" cy="822960"/>
           </a:xfrm>
           <a:prstGeom prst="rect">
@@ -4625,17 +4426,17 @@
           <a:p>
             <a:pPr algn="l">
               <a:spcAft>
-                <a:spcPts val="600"/>
+                <a:spcPts val="700"/>
               </a:spcAft>
             </a:pPr>
             <a:r>
-              <a:rPr sz="3400" b="1">
+              <a:rPr sz="3300" b="1">
                 <a:solidFill>
                   <a:srgbClr val="131E19"/>
                 </a:solidFill>
                 <a:latin typeface="Helvetica Neue"/>
               </a:rPr>
-              <a:t>Sakkiz qatlam</a:t>
+              <a:t>Eng qiyin masala: dori nomlari</a:t>
             </a:r>
           </a:p>
         </p:txBody>
@@ -4648,7 +4449,7 @@
         </p:nvSpPr>
         <p:spPr>
           <a:xfrm>
-            <a:off x="777240" y="1298448"/>
+            <a:off x="777240" y="1316736"/>
             <a:ext cx="10607040" cy="548640"/>
           </a:xfrm>
           <a:prstGeom prst="rect">
@@ -4664,7 +4465,7 @@
           <a:p>
             <a:pPr algn="l">
               <a:spcAft>
-                <a:spcPts val="600"/>
+                <a:spcPts val="700"/>
               </a:spcAft>
             </a:pPr>
             <a:r>
@@ -4674,14 +4475,14 @@
                 </a:solidFill>
                 <a:latin typeface="Helvetica Neue"/>
               </a:rPr>
-              <a:t>Ikkitasi neyron tarmoq, qolgani oddiy algoritm</a:t>
+              <a:t>Modelni qayta o'qitish oylab vaqt olardi. Dekoderni sozlab hal qildim.</a:t>
             </a:r>
           </a:p>
         </p:txBody>
       </p:sp>
       <p:pic>
         <p:nvPicPr>
-          <p:cNvPr id="5" name="Picture 4" descr="2-qatlamlar.png"/>
+          <p:cNvPr id="5" name="Picture 4" descr="5-dori-tuzatish.png"/>
           <p:cNvPicPr>
             <a:picLocks noChangeAspect="1"/>
           </p:cNvPicPr>
@@ -4695,8 +4496,8 @@
         </p:blipFill>
         <p:spPr>
           <a:xfrm>
-            <a:off x="2203352" y="1965960"/>
-            <a:ext cx="7754815" cy="4480560"/>
+            <a:off x="2053508" y="2011680"/>
+            <a:ext cx="8054502" cy="4206240"/>
           </a:xfrm>
           <a:prstGeom prst="rect">
             <a:avLst/>
@@ -4773,7 +4574,7 @@
         </p:nvSpPr>
         <p:spPr>
           <a:xfrm>
-            <a:off x="777240" y="548640"/>
+            <a:off x="777240" y="566928"/>
             <a:ext cx="10607040" cy="822960"/>
           </a:xfrm>
           <a:prstGeom prst="rect">
@@ -4789,31 +4590,121 @@
           <a:p>
             <a:pPr algn="l">
               <a:spcAft>
-                <a:spcPts val="600"/>
+                <a:spcPts val="700"/>
               </a:spcAft>
             </a:pPr>
             <a:r>
-              <a:rPr sz="3400" b="1">
+              <a:rPr sz="3300" b="1">
                 <a:solidFill>
                   <a:srgbClr val="131E19"/>
                 </a:solidFill>
                 <a:latin typeface="Helvetica Neue"/>
               </a:rPr>
-              <a:t>Eng qiyin masala: dori nomlari</a:t>
-            </a:r>
-          </a:p>
-        </p:txBody>
-      </p:sp>
-      <p:sp>
-        <p:nvSpPr>
-          <p:cNvPr id="4" name="TextBox 3"/>
+              <a:t>Nega shunday qurdim</a:t>
+            </a:r>
+          </a:p>
+        </p:txBody>
+      </p:sp>
+      <p:sp>
+        <p:nvSpPr>
+          <p:cNvPr id="4" name="Rounded Rectangle 3"/>
+          <p:cNvSpPr/>
+          <p:nvPr/>
+        </p:nvSpPr>
+        <p:spPr>
+          <a:xfrm>
+            <a:off x="777240" y="2148840"/>
+            <a:ext cx="10607040" cy="1143000"/>
+          </a:xfrm>
+          <a:prstGeom prst="roundRect">
+            <a:avLst/>
+          </a:prstGeom>
+          <a:solidFill>
+            <a:srgbClr val="FFFFFF"/>
+          </a:solidFill>
+          <a:ln w="9525">
+            <a:solidFill>
+              <a:srgbClr val="D9E0DA"/>
+            </a:solidFill>
+          </a:ln>
+          <a:effectLst/>
+        </p:spPr>
+        <p:style>
+          <a:lnRef idx="1">
+            <a:schemeClr val="accent1"/>
+          </a:lnRef>
+          <a:fillRef idx="3">
+            <a:schemeClr val="accent1"/>
+          </a:fillRef>
+          <a:effectRef idx="2">
+            <a:schemeClr val="accent1"/>
+          </a:effectRef>
+          <a:fontRef idx="minor">
+            <a:schemeClr val="lt1"/>
+          </a:fontRef>
+        </p:style>
+        <p:txBody>
+          <a:bodyPr rtlCol="0" anchor="ctr"/>
+          <a:lstStyle/>
+          <a:p>
+            <a:pPr algn="ctr"/>
+          </a:p>
+        </p:txBody>
+      </p:sp>
+      <p:sp>
+        <p:nvSpPr>
+          <p:cNvPr id="5" name="Rounded Rectangle 4"/>
+          <p:cNvSpPr/>
+          <p:nvPr/>
+        </p:nvSpPr>
+        <p:spPr>
+          <a:xfrm>
+            <a:off x="777240" y="2148840"/>
+            <a:ext cx="64008" cy="1143000"/>
+          </a:xfrm>
+          <a:prstGeom prst="roundRect">
+            <a:avLst/>
+          </a:prstGeom>
+          <a:solidFill>
+            <a:srgbClr val="0E6B58"/>
+          </a:solidFill>
+          <a:ln>
+            <a:noFill/>
+          </a:ln>
+          <a:effectLst/>
+        </p:spPr>
+        <p:style>
+          <a:lnRef idx="1">
+            <a:schemeClr val="accent1"/>
+          </a:lnRef>
+          <a:fillRef idx="3">
+            <a:schemeClr val="accent1"/>
+          </a:fillRef>
+          <a:effectRef idx="2">
+            <a:schemeClr val="accent1"/>
+          </a:effectRef>
+          <a:fontRef idx="minor">
+            <a:schemeClr val="lt1"/>
+          </a:fontRef>
+        </p:style>
+        <p:txBody>
+          <a:bodyPr rtlCol="0" anchor="ctr"/>
+          <a:lstStyle/>
+          <a:p>
+            <a:pPr algn="ctr"/>
+          </a:p>
+        </p:txBody>
+      </p:sp>
+      <p:sp>
+        <p:nvSpPr>
+          <p:cNvPr id="6" name="TextBox 5"/>
           <p:cNvSpPr txBox="1"/>
           <p:nvPr/>
         </p:nvSpPr>
         <p:spPr>
           <a:xfrm>
-            <a:off x="777240" y="1298448"/>
-            <a:ext cx="10607040" cy="548640"/>
+            <a:off x="1115568" y="2313432"/>
+            <a:ext cx="10058400" cy="365760"/>
           </a:xfrm>
           <a:prstGeom prst="rect">
             <a:avLst/>
@@ -4828,45 +4719,435 @@
           <a:p>
             <a:pPr algn="l">
               <a:spcAft>
-                <a:spcPts val="600"/>
+                <a:spcPts val="700"/>
               </a:spcAft>
             </a:pPr>
             <a:r>
-              <a:rPr sz="1600" b="0">
+              <a:rPr sz="2000" b="1">
+                <a:solidFill>
+                  <a:srgbClr val="131E19"/>
+                </a:solidFill>
+                <a:latin typeface="Helvetica Neue"/>
+              </a:rPr>
+              <a:t>Bulut o'rniga lokal</a:t>
+            </a:r>
+          </a:p>
+        </p:txBody>
+      </p:sp>
+      <p:sp>
+        <p:nvSpPr>
+          <p:cNvPr id="7" name="TextBox 6"/>
+          <p:cNvSpPr txBox="1"/>
+          <p:nvPr/>
+        </p:nvSpPr>
+        <p:spPr>
+          <a:xfrm>
+            <a:off x="1115568" y="2752344"/>
+            <a:ext cx="10058400" cy="457200"/>
+          </a:xfrm>
+          <a:prstGeom prst="rect">
+            <a:avLst/>
+          </a:prstGeom>
+          <a:noFill/>
+        </p:spPr>
+        <p:txBody>
+          <a:bodyPr wrap="square" lIns="0" rIns="0" tIns="0" bIns="0">
+            <a:spAutoFit/>
+          </a:bodyPr>
+          <a:lstStyle/>
+          <a:p>
+            <a:pPr algn="l">
+              <a:spcAft>
+                <a:spcPts val="700"/>
+              </a:spcAft>
+            </a:pPr>
+            <a:r>
+              <a:rPr sz="1500" b="0">
                 <a:solidFill>
                   <a:srgbClr val="6E7D76"/>
                 </a:solidFill>
                 <a:latin typeface="Helvetica Neue"/>
               </a:rPr>
-              <a:t>Modelni qayta o'qitish oylab vaqt olardi. Dekoderni sozlash bilan hal qildim.</a:t>
-            </a:r>
-          </a:p>
-        </p:txBody>
-      </p:sp>
-      <p:pic>
-        <p:nvPicPr>
-          <p:cNvPr id="5" name="Picture 4" descr="5-dori-tuzatish.png"/>
-          <p:cNvPicPr>
-            <a:picLocks noChangeAspect="1"/>
-          </p:cNvPicPr>
-          <p:nvPr/>
-        </p:nvPicPr>
-        <p:blipFill>
-          <a:blip r:embed="rId2"/>
-          <a:stretch>
-            <a:fillRect/>
-          </a:stretch>
-        </p:blipFill>
-        <p:spPr>
-          <a:xfrm>
-            <a:off x="2053508" y="2011680"/>
-            <a:ext cx="8054502" cy="4206240"/>
+              <a:t>Bulutli xizmatlar biroz aniqroq tanirdi, lekin bemor ovozi tashqariga chiqardi.</a:t>
+            </a:r>
+          </a:p>
+        </p:txBody>
+      </p:sp>
+      <p:sp>
+        <p:nvSpPr>
+          <p:cNvPr id="8" name="Rounded Rectangle 7"/>
+          <p:cNvSpPr/>
+          <p:nvPr/>
+        </p:nvSpPr>
+        <p:spPr>
+          <a:xfrm>
+            <a:off x="777240" y="3520440"/>
+            <a:ext cx="10607040" cy="1143000"/>
+          </a:xfrm>
+          <a:prstGeom prst="roundRect">
+            <a:avLst/>
+          </a:prstGeom>
+          <a:solidFill>
+            <a:srgbClr val="FFFFFF"/>
+          </a:solidFill>
+          <a:ln w="9525">
+            <a:solidFill>
+              <a:srgbClr val="D9E0DA"/>
+            </a:solidFill>
+          </a:ln>
+          <a:effectLst/>
+        </p:spPr>
+        <p:style>
+          <a:lnRef idx="1">
+            <a:schemeClr val="accent1"/>
+          </a:lnRef>
+          <a:fillRef idx="3">
+            <a:schemeClr val="accent1"/>
+          </a:fillRef>
+          <a:effectRef idx="2">
+            <a:schemeClr val="accent1"/>
+          </a:effectRef>
+          <a:fontRef idx="minor">
+            <a:schemeClr val="lt1"/>
+          </a:fontRef>
+        </p:style>
+        <p:txBody>
+          <a:bodyPr rtlCol="0" anchor="ctr"/>
+          <a:lstStyle/>
+          <a:p>
+            <a:pPr algn="ctr"/>
+          </a:p>
+        </p:txBody>
+      </p:sp>
+      <p:sp>
+        <p:nvSpPr>
+          <p:cNvPr id="9" name="Rounded Rectangle 8"/>
+          <p:cNvSpPr/>
+          <p:nvPr/>
+        </p:nvSpPr>
+        <p:spPr>
+          <a:xfrm>
+            <a:off x="777240" y="3520440"/>
+            <a:ext cx="64008" cy="1143000"/>
+          </a:xfrm>
+          <a:prstGeom prst="roundRect">
+            <a:avLst/>
+          </a:prstGeom>
+          <a:solidFill>
+            <a:srgbClr val="0E6B58"/>
+          </a:solidFill>
+          <a:ln>
+            <a:noFill/>
+          </a:ln>
+          <a:effectLst/>
+        </p:spPr>
+        <p:style>
+          <a:lnRef idx="1">
+            <a:schemeClr val="accent1"/>
+          </a:lnRef>
+          <a:fillRef idx="3">
+            <a:schemeClr val="accent1"/>
+          </a:fillRef>
+          <a:effectRef idx="2">
+            <a:schemeClr val="accent1"/>
+          </a:effectRef>
+          <a:fontRef idx="minor">
+            <a:schemeClr val="lt1"/>
+          </a:fontRef>
+        </p:style>
+        <p:txBody>
+          <a:bodyPr rtlCol="0" anchor="ctr"/>
+          <a:lstStyle/>
+          <a:p>
+            <a:pPr algn="ctr"/>
+          </a:p>
+        </p:txBody>
+      </p:sp>
+      <p:sp>
+        <p:nvSpPr>
+          <p:cNvPr id="10" name="TextBox 9"/>
+          <p:cNvSpPr txBox="1"/>
+          <p:nvPr/>
+        </p:nvSpPr>
+        <p:spPr>
+          <a:xfrm>
+            <a:off x="1115568" y="3685032"/>
+            <a:ext cx="10058400" cy="365760"/>
           </a:xfrm>
           <a:prstGeom prst="rect">
             <a:avLst/>
           </a:prstGeom>
-        </p:spPr>
-      </p:pic>
+          <a:noFill/>
+        </p:spPr>
+        <p:txBody>
+          <a:bodyPr wrap="square" lIns="0" rIns="0" tIns="0" bIns="0">
+            <a:spAutoFit/>
+          </a:bodyPr>
+          <a:lstStyle/>
+          <a:p>
+            <a:pPr algn="l">
+              <a:spcAft>
+                <a:spcPts val="700"/>
+              </a:spcAft>
+            </a:pPr>
+            <a:r>
+              <a:rPr sz="2000" b="1">
+                <a:solidFill>
+                  <a:srgbClr val="131E19"/>
+                </a:solidFill>
+                <a:latin typeface="Helvetica Neue"/>
+              </a:rPr>
+              <a:t>Qayta o'qitish o'rniga sozlash</a:t>
+            </a:r>
+          </a:p>
+        </p:txBody>
+      </p:sp>
+      <p:sp>
+        <p:nvSpPr>
+          <p:cNvPr id="11" name="TextBox 10"/>
+          <p:cNvSpPr txBox="1"/>
+          <p:nvPr/>
+        </p:nvSpPr>
+        <p:spPr>
+          <a:xfrm>
+            <a:off x="1115568" y="4123944"/>
+            <a:ext cx="10058400" cy="457200"/>
+          </a:xfrm>
+          <a:prstGeom prst="rect">
+            <a:avLst/>
+          </a:prstGeom>
+          <a:noFill/>
+        </p:spPr>
+        <p:txBody>
+          <a:bodyPr wrap="square" lIns="0" rIns="0" tIns="0" bIns="0">
+            <a:spAutoFit/>
+          </a:bodyPr>
+          <a:lstStyle/>
+          <a:p>
+            <a:pPr algn="l">
+              <a:spcAft>
+                <a:spcPts val="700"/>
+              </a:spcAft>
+            </a:pPr>
+            <a:r>
+              <a:rPr sz="1500" b="0">
+                <a:solidFill>
+                  <a:srgbClr val="6E7D76"/>
+                </a:solidFill>
+                <a:latin typeface="Helvetica Neue"/>
+              </a:rPr>
+              <a:t>O'qitish oylab vaqt va katta ma'lumot talab qilardi. Sozlash bilan 62 dan 88 foizga chiqdim.</a:t>
+            </a:r>
+          </a:p>
+        </p:txBody>
+      </p:sp>
+      <p:sp>
+        <p:nvSpPr>
+          <p:cNvPr id="12" name="Rounded Rectangle 11"/>
+          <p:cNvSpPr/>
+          <p:nvPr/>
+        </p:nvSpPr>
+        <p:spPr>
+          <a:xfrm>
+            <a:off x="777240" y="4892040"/>
+            <a:ext cx="10607040" cy="1143000"/>
+          </a:xfrm>
+          <a:prstGeom prst="roundRect">
+            <a:avLst/>
+          </a:prstGeom>
+          <a:solidFill>
+            <a:srgbClr val="FFFFFF"/>
+          </a:solidFill>
+          <a:ln w="9525">
+            <a:solidFill>
+              <a:srgbClr val="D9E0DA"/>
+            </a:solidFill>
+          </a:ln>
+          <a:effectLst/>
+        </p:spPr>
+        <p:style>
+          <a:lnRef idx="1">
+            <a:schemeClr val="accent1"/>
+          </a:lnRef>
+          <a:fillRef idx="3">
+            <a:schemeClr val="accent1"/>
+          </a:fillRef>
+          <a:effectRef idx="2">
+            <a:schemeClr val="accent1"/>
+          </a:effectRef>
+          <a:fontRef idx="minor">
+            <a:schemeClr val="lt1"/>
+          </a:fontRef>
+        </p:style>
+        <p:txBody>
+          <a:bodyPr rtlCol="0" anchor="ctr"/>
+          <a:lstStyle/>
+          <a:p>
+            <a:pPr algn="ctr"/>
+          </a:p>
+        </p:txBody>
+      </p:sp>
+      <p:sp>
+        <p:nvSpPr>
+          <p:cNvPr id="13" name="Rounded Rectangle 12"/>
+          <p:cNvSpPr/>
+          <p:nvPr/>
+        </p:nvSpPr>
+        <p:spPr>
+          <a:xfrm>
+            <a:off x="777240" y="4892040"/>
+            <a:ext cx="64008" cy="1143000"/>
+          </a:xfrm>
+          <a:prstGeom prst="roundRect">
+            <a:avLst/>
+          </a:prstGeom>
+          <a:solidFill>
+            <a:srgbClr val="0E6B58"/>
+          </a:solidFill>
+          <a:ln>
+            <a:noFill/>
+          </a:ln>
+          <a:effectLst/>
+        </p:spPr>
+        <p:style>
+          <a:lnRef idx="1">
+            <a:schemeClr val="accent1"/>
+          </a:lnRef>
+          <a:fillRef idx="3">
+            <a:schemeClr val="accent1"/>
+          </a:fillRef>
+          <a:effectRef idx="2">
+            <a:schemeClr val="accent1"/>
+          </a:effectRef>
+          <a:fontRef idx="minor">
+            <a:schemeClr val="lt1"/>
+          </a:fontRef>
+        </p:style>
+        <p:txBody>
+          <a:bodyPr rtlCol="0" anchor="ctr"/>
+          <a:lstStyle/>
+          <a:p>
+            <a:pPr algn="ctr"/>
+          </a:p>
+        </p:txBody>
+      </p:sp>
+      <p:sp>
+        <p:nvSpPr>
+          <p:cNvPr id="14" name="TextBox 13"/>
+          <p:cNvSpPr txBox="1"/>
+          <p:nvPr/>
+        </p:nvSpPr>
+        <p:spPr>
+          <a:xfrm>
+            <a:off x="1115568" y="5056631"/>
+            <a:ext cx="10058400" cy="365760"/>
+          </a:xfrm>
+          <a:prstGeom prst="rect">
+            <a:avLst/>
+          </a:prstGeom>
+          <a:noFill/>
+        </p:spPr>
+        <p:txBody>
+          <a:bodyPr wrap="square" lIns="0" rIns="0" tIns="0" bIns="0">
+            <a:spAutoFit/>
+          </a:bodyPr>
+          <a:lstStyle/>
+          <a:p>
+            <a:pPr algn="l">
+              <a:spcAft>
+                <a:spcPts val="700"/>
+              </a:spcAft>
+            </a:pPr>
+            <a:r>
+              <a:rPr sz="2000" b="1">
+                <a:solidFill>
+                  <a:srgbClr val="131E19"/>
+                </a:solidFill>
+                <a:latin typeface="Helvetica Neue"/>
+              </a:rPr>
+              <a:t>Til modeli o'rniga oddiy usul</a:t>
+            </a:r>
+          </a:p>
+        </p:txBody>
+      </p:sp>
+      <p:sp>
+        <p:nvSpPr>
+          <p:cNvPr id="15" name="TextBox 14"/>
+          <p:cNvSpPr txBox="1"/>
+          <p:nvPr/>
+        </p:nvSpPr>
+        <p:spPr>
+          <a:xfrm>
+            <a:off x="1115568" y="5495544"/>
+            <a:ext cx="10058400" cy="457200"/>
+          </a:xfrm>
+          <a:prstGeom prst="rect">
+            <a:avLst/>
+          </a:prstGeom>
+          <a:noFill/>
+        </p:spPr>
+        <p:txBody>
+          <a:bodyPr wrap="square" lIns="0" rIns="0" tIns="0" bIns="0">
+            <a:spAutoFit/>
+          </a:bodyPr>
+          <a:lstStyle/>
+          <a:p>
+            <a:pPr algn="l">
+              <a:spcAft>
+                <a:spcPts val="700"/>
+              </a:spcAft>
+            </a:pPr>
+            <a:r>
+              <a:rPr sz="1500" b="0">
+                <a:solidFill>
+                  <a:srgbClr val="6E7D76"/>
+                </a:solidFill>
+                <a:latin typeface="Helvetica Neue"/>
+              </a:rPr>
+              <a:t>Tashxis kodiga til modeli qo'yish mumkin edi. Oddiy usul tezroq ishladi va qaysi so'z sabab bo'lganini ko'rsatadi.</a:t>
+            </a:r>
+          </a:p>
+        </p:txBody>
+      </p:sp>
+      <p:sp>
+        <p:nvSpPr>
+          <p:cNvPr id="16" name="TextBox 15"/>
+          <p:cNvSpPr txBox="1"/>
+          <p:nvPr/>
+        </p:nvSpPr>
+        <p:spPr>
+          <a:xfrm>
+            <a:off x="777240" y="6355080"/>
+            <a:ext cx="10607040" cy="365760"/>
+          </a:xfrm>
+          <a:prstGeom prst="rect">
+            <a:avLst/>
+          </a:prstGeom>
+          <a:noFill/>
+        </p:spPr>
+        <p:txBody>
+          <a:bodyPr wrap="square" lIns="0" rIns="0" tIns="0" bIns="0">
+            <a:spAutoFit/>
+          </a:bodyPr>
+          <a:lstStyle/>
+          <a:p>
+            <a:pPr algn="l">
+              <a:spcAft>
+                <a:spcPts val="700"/>
+              </a:spcAft>
+            </a:pPr>
+            <a:r>
+              <a:rPr sz="1500" b="0">
+                <a:solidFill>
+                  <a:srgbClr val="A05007"/>
+                </a:solidFill>
+                <a:latin typeface="Helvetica Neue"/>
+              </a:rPr>
+              <a:t>Har bir tanlovda tezlik va tushuntirib bera olish muhimroq bo'ldi.</a:t>
+            </a:r>
+          </a:p>
+        </p:txBody>
+      </p:sp>
     </p:spTree>
   </p:cSld>
   <p:clrMapOvr>
@@ -4937,7 +5218,7 @@
         </p:nvSpPr>
         <p:spPr>
           <a:xfrm>
-            <a:off x="777240" y="548640"/>
+            <a:off x="777240" y="566928"/>
             <a:ext cx="10607040" cy="822960"/>
           </a:xfrm>
           <a:prstGeom prst="rect">
@@ -4953,345 +5234,17 @@
           <a:p>
             <a:pPr algn="l">
               <a:spcAft>
-                <a:spcPts val="600"/>
+                <a:spcPts val="700"/>
               </a:spcAft>
             </a:pPr>
             <a:r>
-              <a:rPr sz="3400" b="1">
+              <a:rPr sz="3300" b="1">
                 <a:solidFill>
                   <a:srgbClr val="131E19"/>
                 </a:solidFill>
                 <a:latin typeface="Helvetica Neue"/>
               </a:rPr>
-              <a:t>Tizim qachon ishonmasligini biladi</a:t>
-            </a:r>
-          </a:p>
-        </p:txBody>
-      </p:sp>
-      <p:sp>
-        <p:nvSpPr>
-          <p:cNvPr id="4" name="TextBox 3"/>
-          <p:cNvSpPr txBox="1"/>
-          <p:nvPr/>
-        </p:nvSpPr>
-        <p:spPr>
-          <a:xfrm>
-            <a:off x="777240" y="1298448"/>
-            <a:ext cx="10607040" cy="548640"/>
-          </a:xfrm>
-          <a:prstGeom prst="rect">
-            <a:avLst/>
-          </a:prstGeom>
-          <a:noFill/>
-        </p:spPr>
-        <p:txBody>
-          <a:bodyPr wrap="square" lIns="0" rIns="0" tIns="0" bIns="0">
-            <a:spAutoFit/>
-          </a:bodyPr>
-          <a:lstStyle/>
-          <a:p>
-            <a:pPr algn="l">
-              <a:spcAft>
-                <a:spcPts val="600"/>
-              </a:spcAft>
-            </a:pPr>
-            <a:r>
-              <a:rPr sz="1600" b="0">
-                <a:solidFill>
-                  <a:srgbClr val="6E7D76"/>
-                </a:solidFill>
-                <a:latin typeface="Helvetica Neue"/>
-              </a:rPr>
-              <a:t>Uchta mustaqil nazorat. Birortasi ishlasa, shifokor tekshiradi.</a:t>
-            </a:r>
-          </a:p>
-        </p:txBody>
-      </p:sp>
-      <p:pic>
-        <p:nvPicPr>
-          <p:cNvPr id="5" name="Picture 4" descr="3-gallyutsinatsiya.png"/>
-          <p:cNvPicPr>
-            <a:picLocks noChangeAspect="1"/>
-          </p:cNvPicPr>
-          <p:nvPr/>
-        </p:nvPicPr>
-        <p:blipFill>
-          <a:blip r:embed="rId2"/>
-          <a:stretch>
-            <a:fillRect/>
-          </a:stretch>
-        </p:blipFill>
-        <p:spPr>
-          <a:xfrm>
-            <a:off x="1754451" y="2011680"/>
-            <a:ext cx="8652616" cy="4114800"/>
-          </a:xfrm>
-          <a:prstGeom prst="rect">
-            <a:avLst/>
-          </a:prstGeom>
-        </p:spPr>
-      </p:pic>
-    </p:spTree>
-  </p:cSld>
-  <p:clrMapOvr>
-    <a:masterClrMapping/>
-  </p:clrMapOvr>
-</p:sld>
-</file>
-
-<file path=ppt/slides/slide7.xml><?xml version="1.0" encoding="utf-8"?>
-<p:sld xmlns:a="http://schemas.openxmlformats.org/drawingml/2006/main" xmlns:p="http://schemas.openxmlformats.org/presentationml/2006/main" xmlns:r="http://schemas.openxmlformats.org/officeDocument/2006/relationships">
-  <p:cSld>
-    <p:spTree>
-      <p:nvGrpSpPr>
-        <p:cNvPr id="1" name=""/>
-        <p:cNvGrpSpPr/>
-        <p:nvPr/>
-      </p:nvGrpSpPr>
-      <p:grpSpPr/>
-      <p:sp>
-        <p:nvSpPr>
-          <p:cNvPr id="2" name="Rectangle 1"/>
-          <p:cNvSpPr/>
-          <p:nvPr/>
-        </p:nvSpPr>
-        <p:spPr>
-          <a:xfrm>
-            <a:off x="0" y="0"/>
-            <a:ext cx="12191695" cy="6858000"/>
-          </a:xfrm>
-          <a:prstGeom prst="rect">
-            <a:avLst/>
-          </a:prstGeom>
-          <a:solidFill>
-            <a:srgbClr val="F6F7F4"/>
-          </a:solidFill>
-          <a:ln>
-            <a:noFill/>
-          </a:ln>
-          <a:effectLst/>
-        </p:spPr>
-        <p:style>
-          <a:lnRef idx="1">
-            <a:schemeClr val="accent1"/>
-          </a:lnRef>
-          <a:fillRef idx="3">
-            <a:schemeClr val="accent1"/>
-          </a:fillRef>
-          <a:effectRef idx="2">
-            <a:schemeClr val="accent1"/>
-          </a:effectRef>
-          <a:fontRef idx="minor">
-            <a:schemeClr val="lt1"/>
-          </a:fontRef>
-        </p:style>
-        <p:txBody>
-          <a:bodyPr rtlCol="0" anchor="ctr"/>
-          <a:lstStyle/>
-          <a:p>
-            <a:pPr algn="ctr"/>
-          </a:p>
-        </p:txBody>
-      </p:sp>
-      <p:sp>
-        <p:nvSpPr>
-          <p:cNvPr id="3" name="TextBox 2"/>
-          <p:cNvSpPr txBox="1"/>
-          <p:nvPr/>
-        </p:nvSpPr>
-        <p:spPr>
-          <a:xfrm>
-            <a:off x="777240" y="548640"/>
-            <a:ext cx="10607040" cy="822960"/>
-          </a:xfrm>
-          <a:prstGeom prst="rect">
-            <a:avLst/>
-          </a:prstGeom>
-          <a:noFill/>
-        </p:spPr>
-        <p:txBody>
-          <a:bodyPr wrap="square" lIns="0" rIns="0" tIns="0" bIns="0">
-            <a:spAutoFit/>
-          </a:bodyPr>
-          <a:lstStyle/>
-          <a:p>
-            <a:pPr algn="l">
-              <a:spcAft>
-                <a:spcPts val="600"/>
-              </a:spcAft>
-            </a:pPr>
-            <a:r>
-              <a:rPr sz="3400" b="1">
-                <a:solidFill>
-                  <a:srgbClr val="131E19"/>
-                </a:solidFill>
-                <a:latin typeface="Helvetica Neue"/>
-              </a:rPr>
-              <a:t>“Og'riq yo'q” degani ham ma'lumot</a:t>
-            </a:r>
-          </a:p>
-        </p:txBody>
-      </p:sp>
-      <p:sp>
-        <p:nvSpPr>
-          <p:cNvPr id="4" name="TextBox 3"/>
-          <p:cNvSpPr txBox="1"/>
-          <p:nvPr/>
-        </p:nvSpPr>
-        <p:spPr>
-          <a:xfrm>
-            <a:off x="777240" y="1298448"/>
-            <a:ext cx="10607040" cy="548640"/>
-          </a:xfrm>
-          <a:prstGeom prst="rect">
-            <a:avLst/>
-          </a:prstGeom>
-          <a:noFill/>
-        </p:spPr>
-        <p:txBody>
-          <a:bodyPr wrap="square" lIns="0" rIns="0" tIns="0" bIns="0">
-            <a:spAutoFit/>
-          </a:bodyPr>
-          <a:lstStyle/>
-          <a:p>
-            <a:pPr algn="l">
-              <a:spcAft>
-                <a:spcPts val="600"/>
-              </a:spcAft>
-            </a:pPr>
-            <a:r>
-              <a:rPr sz="1600" b="0">
-                <a:solidFill>
-                  <a:srgbClr val="6E7D76"/>
-                </a:solidFill>
-                <a:latin typeface="Helvetica Neue"/>
-              </a:rPr>
-              <a:t>Inkorni tushunmagan tizim bemorga yo'q kasallik kodini yozadi</a:t>
-            </a:r>
-          </a:p>
-        </p:txBody>
-      </p:sp>
-      <p:pic>
-        <p:nvPicPr>
-          <p:cNvPr id="5" name="Picture 4" descr="4-inkor-kodlash.png"/>
-          <p:cNvPicPr>
-            <a:picLocks noChangeAspect="1"/>
-          </p:cNvPicPr>
-          <p:nvPr/>
-        </p:nvPicPr>
-        <p:blipFill>
-          <a:blip r:embed="rId2"/>
-          <a:stretch>
-            <a:fillRect/>
-          </a:stretch>
-        </p:blipFill>
-        <p:spPr>
-          <a:xfrm>
-            <a:off x="1672045" y="2011680"/>
-            <a:ext cx="8817428" cy="4114800"/>
-          </a:xfrm>
-          <a:prstGeom prst="rect">
-            <a:avLst/>
-          </a:prstGeom>
-        </p:spPr>
-      </p:pic>
-    </p:spTree>
-  </p:cSld>
-  <p:clrMapOvr>
-    <a:masterClrMapping/>
-  </p:clrMapOvr>
-</p:sld>
-</file>
-
-<file path=ppt/slides/slide8.xml><?xml version="1.0" encoding="utf-8"?>
-<p:sld xmlns:a="http://schemas.openxmlformats.org/drawingml/2006/main" xmlns:p="http://schemas.openxmlformats.org/presentationml/2006/main" xmlns:r="http://schemas.openxmlformats.org/officeDocument/2006/relationships">
-  <p:cSld>
-    <p:spTree>
-      <p:nvGrpSpPr>
-        <p:cNvPr id="1" name=""/>
-        <p:cNvGrpSpPr/>
-        <p:nvPr/>
-      </p:nvGrpSpPr>
-      <p:grpSpPr/>
-      <p:sp>
-        <p:nvSpPr>
-          <p:cNvPr id="2" name="Rectangle 1"/>
-          <p:cNvSpPr/>
-          <p:nvPr/>
-        </p:nvSpPr>
-        <p:spPr>
-          <a:xfrm>
-            <a:off x="0" y="0"/>
-            <a:ext cx="12191695" cy="6858000"/>
-          </a:xfrm>
-          <a:prstGeom prst="rect">
-            <a:avLst/>
-          </a:prstGeom>
-          <a:solidFill>
-            <a:srgbClr val="F6F7F4"/>
-          </a:solidFill>
-          <a:ln>
-            <a:noFill/>
-          </a:ln>
-          <a:effectLst/>
-        </p:spPr>
-        <p:style>
-          <a:lnRef idx="1">
-            <a:schemeClr val="accent1"/>
-          </a:lnRef>
-          <a:fillRef idx="3">
-            <a:schemeClr val="accent1"/>
-          </a:fillRef>
-          <a:effectRef idx="2">
-            <a:schemeClr val="accent1"/>
-          </a:effectRef>
-          <a:fontRef idx="minor">
-            <a:schemeClr val="lt1"/>
-          </a:fontRef>
-        </p:style>
-        <p:txBody>
-          <a:bodyPr rtlCol="0" anchor="ctr"/>
-          <a:lstStyle/>
-          <a:p>
-            <a:pPr algn="ctr"/>
-          </a:p>
-        </p:txBody>
-      </p:sp>
-      <p:sp>
-        <p:nvSpPr>
-          <p:cNvPr id="3" name="TextBox 2"/>
-          <p:cNvSpPr txBox="1"/>
-          <p:nvPr/>
-        </p:nvSpPr>
-        <p:spPr>
-          <a:xfrm>
-            <a:off x="777240" y="548640"/>
-            <a:ext cx="10607040" cy="822960"/>
-          </a:xfrm>
-          <a:prstGeom prst="rect">
-            <a:avLst/>
-          </a:prstGeom>
-          <a:noFill/>
-        </p:spPr>
-        <p:txBody>
-          <a:bodyPr wrap="square" lIns="0" rIns="0" tIns="0" bIns="0">
-            <a:spAutoFit/>
-          </a:bodyPr>
-          <a:lstStyle/>
-          <a:p>
-            <a:pPr algn="l">
-              <a:spcAft>
-                <a:spcPts val="600"/>
-              </a:spcAft>
-            </a:pPr>
-            <a:r>
-              <a:rPr sz="3400" b="1">
-                <a:solidFill>
-                  <a:srgbClr val="131E19"/>
-                </a:solidFill>
-                <a:latin typeface="Helvetica Neue"/>
-              </a:rPr>
-              <a:t>Nega shunday qurdim</a:t>
+              <a:t>Ishonchlilik</a:t>
             </a:r>
           </a:p>
         </p:txBody>
@@ -5304,8 +5257,8 @@
         </p:nvSpPr>
         <p:spPr>
           <a:xfrm>
-            <a:off x="777240" y="2103120"/>
-            <a:ext cx="10607040" cy="1097280"/>
+            <a:off x="777240" y="2286000"/>
+            <a:ext cx="3383280" cy="2194560"/>
           </a:xfrm>
           <a:prstGeom prst="roundRect">
             <a:avLst/>
@@ -5350,8 +5303,8 @@
         </p:nvSpPr>
         <p:spPr>
           <a:xfrm>
-            <a:off x="777240" y="2103120"/>
-            <a:ext cx="64008" cy="1097280"/>
+            <a:off x="777240" y="2286000"/>
+            <a:ext cx="64008" cy="2194560"/>
           </a:xfrm>
           <a:prstGeom prst="roundRect">
             <a:avLst/>
@@ -5394,8 +5347,8 @@
         </p:nvSpPr>
         <p:spPr>
           <a:xfrm>
-            <a:off x="1097280" y="2249424"/>
-            <a:ext cx="10058400" cy="365760"/>
+            <a:off x="1161288" y="2633472"/>
+            <a:ext cx="2743200" cy="731520"/>
           </a:xfrm>
           <a:prstGeom prst="rect">
             <a:avLst/>
@@ -5410,31 +5363,70 @@
           <a:p>
             <a:pPr algn="l">
               <a:spcAft>
-                <a:spcPts val="600"/>
+                <a:spcPts val="700"/>
               </a:spcAft>
             </a:pPr>
             <a:r>
-              <a:rPr sz="1900" b="1">
+              <a:rPr sz="3800" b="1">
+                <a:solidFill>
+                  <a:srgbClr val="0E6B58"/>
+                </a:solidFill>
+                <a:latin typeface="Helvetica Neue"/>
+              </a:rPr>
+              <a:t>51</a:t>
+            </a:r>
+          </a:p>
+        </p:txBody>
+      </p:sp>
+      <p:sp>
+        <p:nvSpPr>
+          <p:cNvPr id="7" name="TextBox 6"/>
+          <p:cNvSpPr txBox="1"/>
+          <p:nvPr/>
+        </p:nvSpPr>
+        <p:spPr>
+          <a:xfrm>
+            <a:off x="1161288" y="3364992"/>
+            <a:ext cx="2743200" cy="365760"/>
+          </a:xfrm>
+          <a:prstGeom prst="rect">
+            <a:avLst/>
+          </a:prstGeom>
+          <a:noFill/>
+        </p:spPr>
+        <p:txBody>
+          <a:bodyPr wrap="square" lIns="0" rIns="0" tIns="0" bIns="0">
+            <a:spAutoFit/>
+          </a:bodyPr>
+          <a:lstStyle/>
+          <a:p>
+            <a:pPr algn="l">
+              <a:spcAft>
+                <a:spcPts val="700"/>
+              </a:spcAft>
+            </a:pPr>
+            <a:r>
+              <a:rPr sz="1700" b="1">
                 <a:solidFill>
                   <a:srgbClr val="131E19"/>
                 </a:solidFill>
                 <a:latin typeface="Helvetica Neue"/>
               </a:rPr>
-              <a:t>Bulut o'rniga lokal</a:t>
-            </a:r>
-          </a:p>
-        </p:txBody>
-      </p:sp>
-      <p:sp>
-        <p:nvSpPr>
-          <p:cNvPr id="7" name="TextBox 6"/>
+              <a:t>avtomatik test</a:t>
+            </a:r>
+          </a:p>
+        </p:txBody>
+      </p:sp>
+      <p:sp>
+        <p:nvSpPr>
+          <p:cNvPr id="8" name="TextBox 7"/>
           <p:cNvSpPr txBox="1"/>
           <p:nvPr/>
         </p:nvSpPr>
         <p:spPr>
           <a:xfrm>
-            <a:off x="1097280" y="2670048"/>
-            <a:ext cx="10058400" cy="457200"/>
+            <a:off x="1161288" y="3767328"/>
+            <a:ext cx="2743200" cy="640080"/>
           </a:xfrm>
           <a:prstGeom prst="rect">
             <a:avLst/>
@@ -5449,31 +5441,31 @@
           <a:p>
             <a:pPr algn="l">
               <a:spcAft>
-                <a:spcPts val="600"/>
+                <a:spcPts val="700"/>
               </a:spcAft>
             </a:pPr>
             <a:r>
-              <a:rPr sz="1500" b="0">
+              <a:rPr sz="1300" b="0">
                 <a:solidFill>
                   <a:srgbClr val="6E7D76"/>
                 </a:solidFill>
                 <a:latin typeface="Helvetica Neue"/>
               </a:rPr>
-              <a:t>Bulutli xizmatlar biroz aniqroq tanirdi, lekin bemor ovozi tashqariga chiqardi.</a:t>
-            </a:r>
-          </a:p>
-        </p:txBody>
-      </p:sp>
-      <p:sp>
-        <p:nvSpPr>
-          <p:cNvPr id="8" name="Rounded Rectangle 7"/>
+              <a:t>Bir marta tuzatilgan xato qaytib kelmaydi</a:t>
+            </a:r>
+          </a:p>
+        </p:txBody>
+      </p:sp>
+      <p:sp>
+        <p:nvSpPr>
+          <p:cNvPr id="9" name="Rounded Rectangle 8"/>
           <p:cNvSpPr/>
           <p:nvPr/>
         </p:nvSpPr>
         <p:spPr>
           <a:xfrm>
-            <a:off x="777240" y="3429000"/>
-            <a:ext cx="10607040" cy="1097280"/>
+            <a:off x="4389120" y="2286000"/>
+            <a:ext cx="3383280" cy="2194560"/>
           </a:xfrm>
           <a:prstGeom prst="roundRect">
             <a:avLst/>
@@ -5512,14 +5504,14 @@
       </p:sp>
       <p:sp>
         <p:nvSpPr>
-          <p:cNvPr id="9" name="Rounded Rectangle 8"/>
+          <p:cNvPr id="10" name="Rounded Rectangle 9"/>
           <p:cNvSpPr/>
           <p:nvPr/>
         </p:nvSpPr>
         <p:spPr>
           <a:xfrm>
-            <a:off x="777240" y="3429000"/>
-            <a:ext cx="64008" cy="1097280"/>
+            <a:off x="4389120" y="2286000"/>
+            <a:ext cx="64008" cy="2194560"/>
           </a:xfrm>
           <a:prstGeom prst="roundRect">
             <a:avLst/>
@@ -5556,14 +5548,14 @@
       </p:sp>
       <p:sp>
         <p:nvSpPr>
-          <p:cNvPr id="10" name="TextBox 9"/>
+          <p:cNvPr id="11" name="TextBox 10"/>
           <p:cNvSpPr txBox="1"/>
           <p:nvPr/>
         </p:nvSpPr>
         <p:spPr>
           <a:xfrm>
-            <a:off x="1097280" y="3575304"/>
-            <a:ext cx="10058400" cy="365760"/>
+            <a:off x="4773168" y="2633472"/>
+            <a:ext cx="2743200" cy="731520"/>
           </a:xfrm>
           <a:prstGeom prst="rect">
             <a:avLst/>
@@ -5578,31 +5570,70 @@
           <a:p>
             <a:pPr algn="l">
               <a:spcAft>
-                <a:spcPts val="600"/>
+                <a:spcPts val="700"/>
               </a:spcAft>
             </a:pPr>
             <a:r>
-              <a:rPr sz="1900" b="1">
+              <a:rPr sz="3800" b="1">
+                <a:solidFill>
+                  <a:srgbClr val="0E6B58"/>
+                </a:solidFill>
+                <a:latin typeface="Helvetica Neue"/>
+              </a:rPr>
+              <a:t>100%</a:t>
+            </a:r>
+          </a:p>
+        </p:txBody>
+      </p:sp>
+      <p:sp>
+        <p:nvSpPr>
+          <p:cNvPr id="12" name="TextBox 11"/>
+          <p:cNvSpPr txBox="1"/>
+          <p:nvPr/>
+        </p:nvSpPr>
+        <p:spPr>
+          <a:xfrm>
+            <a:off x="4773168" y="3364992"/>
+            <a:ext cx="2743200" cy="365760"/>
+          </a:xfrm>
+          <a:prstGeom prst="rect">
+            <a:avLst/>
+          </a:prstGeom>
+          <a:noFill/>
+        </p:spPr>
+        <p:txBody>
+          <a:bodyPr wrap="square" lIns="0" rIns="0" tIns="0" bIns="0">
+            <a:spAutoFit/>
+          </a:bodyPr>
+          <a:lstStyle/>
+          <a:p>
+            <a:pPr algn="l">
+              <a:spcAft>
+                <a:spcPts val="700"/>
+              </a:spcAft>
+            </a:pPr>
+            <a:r>
+              <a:rPr sz="1700" b="1">
                 <a:solidFill>
                   <a:srgbClr val="131E19"/>
                 </a:solidFill>
                 <a:latin typeface="Helvetica Neue"/>
               </a:rPr>
-              <a:t>Qayta o'qitish o'rniga dekoder sozlash</a:t>
-            </a:r>
-          </a:p>
-        </p:txBody>
-      </p:sp>
-      <p:sp>
-        <p:nvSpPr>
-          <p:cNvPr id="11" name="TextBox 10"/>
+              <a:t>shifokor nazorati</a:t>
+            </a:r>
+          </a:p>
+        </p:txBody>
+      </p:sp>
+      <p:sp>
+        <p:nvSpPr>
+          <p:cNvPr id="13" name="TextBox 12"/>
           <p:cNvSpPr txBox="1"/>
           <p:nvPr/>
         </p:nvSpPr>
         <p:spPr>
           <a:xfrm>
-            <a:off x="1097280" y="3995928"/>
-            <a:ext cx="10058400" cy="457200"/>
+            <a:off x="4773168" y="3767328"/>
+            <a:ext cx="2743200" cy="640080"/>
           </a:xfrm>
           <a:prstGeom prst="rect">
             <a:avLst/>
@@ -5617,31 +5648,31 @@
           <a:p>
             <a:pPr algn="l">
               <a:spcAft>
-                <a:spcPts val="600"/>
+                <a:spcPts val="700"/>
               </a:spcAft>
             </a:pPr>
             <a:r>
-              <a:rPr sz="1500" b="0">
+              <a:rPr sz="1300" b="0">
                 <a:solidFill>
                   <a:srgbClr val="6E7D76"/>
                 </a:solidFill>
                 <a:latin typeface="Helvetica Neue"/>
               </a:rPr>
-              <a:t>Model o'qitish oylab vaqt va katta ma'lumot talab qilardi. Sozlash bilan 62 dan 88 foizga chiqdim.</a:t>
-            </a:r>
-          </a:p>
-        </p:txBody>
-      </p:sp>
-      <p:sp>
-        <p:nvSpPr>
-          <p:cNvPr id="12" name="Rounded Rectangle 11"/>
+              <a:t>Past ishonchli taklif o'zi yoqilmaydi</a:t>
+            </a:r>
+          </a:p>
+        </p:txBody>
+      </p:sp>
+      <p:sp>
+        <p:nvSpPr>
+          <p:cNvPr id="14" name="Rounded Rectangle 13"/>
           <p:cNvSpPr/>
           <p:nvPr/>
         </p:nvSpPr>
         <p:spPr>
           <a:xfrm>
-            <a:off x="777240" y="4754879"/>
-            <a:ext cx="10607040" cy="1097280"/>
+            <a:off x="8001000" y="2286000"/>
+            <a:ext cx="3383280" cy="2194560"/>
           </a:xfrm>
           <a:prstGeom prst="roundRect">
             <a:avLst/>
@@ -5680,14 +5711,14 @@
       </p:sp>
       <p:sp>
         <p:nvSpPr>
-          <p:cNvPr id="13" name="Rounded Rectangle 12"/>
+          <p:cNvPr id="15" name="Rounded Rectangle 14"/>
           <p:cNvSpPr/>
           <p:nvPr/>
         </p:nvSpPr>
         <p:spPr>
           <a:xfrm>
-            <a:off x="777240" y="4754879"/>
-            <a:ext cx="64008" cy="1097280"/>
+            <a:off x="8001000" y="2286000"/>
+            <a:ext cx="64008" cy="2194560"/>
           </a:xfrm>
           <a:prstGeom prst="roundRect">
             <a:avLst/>
@@ -5724,14 +5755,14 @@
       </p:sp>
       <p:sp>
         <p:nvSpPr>
-          <p:cNvPr id="14" name="TextBox 13"/>
+          <p:cNvPr id="16" name="TextBox 15"/>
           <p:cNvSpPr txBox="1"/>
           <p:nvPr/>
         </p:nvSpPr>
         <p:spPr>
           <a:xfrm>
-            <a:off x="1097280" y="4901183"/>
-            <a:ext cx="10058400" cy="365760"/>
+            <a:off x="8385048" y="2633472"/>
+            <a:ext cx="2743200" cy="731520"/>
           </a:xfrm>
           <a:prstGeom prst="rect">
             <a:avLst/>
@@ -5746,729 +5777,7 @@
           <a:p>
             <a:pPr algn="l">
               <a:spcAft>
-                <a:spcPts val="600"/>
-              </a:spcAft>
-            </a:pPr>
-            <a:r>
-              <a:rPr sz="1900" b="1">
-                <a:solidFill>
-                  <a:srgbClr val="131E19"/>
-                </a:solidFill>
-                <a:latin typeface="Helvetica Neue"/>
-              </a:rPr>
-              <a:t>Til modeli o'rniga oddiy usul</a:t>
-            </a:r>
-          </a:p>
-        </p:txBody>
-      </p:sp>
-      <p:sp>
-        <p:nvSpPr>
-          <p:cNvPr id="15" name="TextBox 14"/>
-          <p:cNvSpPr txBox="1"/>
-          <p:nvPr/>
-        </p:nvSpPr>
-        <p:spPr>
-          <a:xfrm>
-            <a:off x="1097280" y="5321807"/>
-            <a:ext cx="10058400" cy="457200"/>
-          </a:xfrm>
-          <a:prstGeom prst="rect">
-            <a:avLst/>
-          </a:prstGeom>
-          <a:noFill/>
-        </p:spPr>
-        <p:txBody>
-          <a:bodyPr wrap="square" lIns="0" rIns="0" tIns="0" bIns="0">
-            <a:spAutoFit/>
-          </a:bodyPr>
-          <a:lstStyle/>
-          <a:p>
-            <a:pPr algn="l">
-              <a:spcAft>
-                <a:spcPts val="600"/>
-              </a:spcAft>
-            </a:pPr>
-            <a:r>
-              <a:rPr sz="1500" b="0">
-                <a:solidFill>
-                  <a:srgbClr val="6E7D76"/>
-                </a:solidFill>
-                <a:latin typeface="Helvetica Neue"/>
-              </a:rPr>
-              <a:t>Tashxis kodiga til modeli qo'yish mumkin edi. Oddiy usul tezroq ishladi va qaysi so'z sabab bo'lganini ko'rsatadi.</a:t>
-            </a:r>
-          </a:p>
-        </p:txBody>
-      </p:sp>
-      <p:sp>
-        <p:nvSpPr>
-          <p:cNvPr id="16" name="TextBox 15"/>
-          <p:cNvSpPr txBox="1"/>
-          <p:nvPr/>
-        </p:nvSpPr>
-        <p:spPr>
-          <a:xfrm>
-            <a:off x="777240" y="6172200"/>
-            <a:ext cx="10607040" cy="457200"/>
-          </a:xfrm>
-          <a:prstGeom prst="rect">
-            <a:avLst/>
-          </a:prstGeom>
-          <a:noFill/>
-        </p:spPr>
-        <p:txBody>
-          <a:bodyPr wrap="square" lIns="0" rIns="0" tIns="0" bIns="0">
-            <a:spAutoFit/>
-          </a:bodyPr>
-          <a:lstStyle/>
-          <a:p>
-            <a:pPr algn="l">
-              <a:spcAft>
-                <a:spcPts val="600"/>
-              </a:spcAft>
-            </a:pPr>
-            <a:r>
-              <a:rPr sz="1500" b="0">
-                <a:solidFill>
-                  <a:srgbClr val="A05007"/>
-                </a:solidFill>
-                <a:latin typeface="Helvetica Neue"/>
-              </a:rPr>
-              <a:t>Har bir tanlovda tezlik va tushuntirib bera olish muhimroq bo'ldi.</a:t>
-            </a:r>
-          </a:p>
-        </p:txBody>
-      </p:sp>
-    </p:spTree>
-  </p:cSld>
-  <p:clrMapOvr>
-    <a:masterClrMapping/>
-  </p:clrMapOvr>
-</p:sld>
-</file>
-
-<file path=ppt/slides/slide9.xml><?xml version="1.0" encoding="utf-8"?>
-<p:sld xmlns:a="http://schemas.openxmlformats.org/drawingml/2006/main" xmlns:p="http://schemas.openxmlformats.org/presentationml/2006/main" xmlns:r="http://schemas.openxmlformats.org/officeDocument/2006/relationships">
-  <p:cSld>
-    <p:spTree>
-      <p:nvGrpSpPr>
-        <p:cNvPr id="1" name=""/>
-        <p:cNvGrpSpPr/>
-        <p:nvPr/>
-      </p:nvGrpSpPr>
-      <p:grpSpPr/>
-      <p:sp>
-        <p:nvSpPr>
-          <p:cNvPr id="2" name="Rectangle 1"/>
-          <p:cNvSpPr/>
-          <p:nvPr/>
-        </p:nvSpPr>
-        <p:spPr>
-          <a:xfrm>
-            <a:off x="0" y="0"/>
-            <a:ext cx="12191695" cy="6858000"/>
-          </a:xfrm>
-          <a:prstGeom prst="rect">
-            <a:avLst/>
-          </a:prstGeom>
-          <a:solidFill>
-            <a:srgbClr val="F6F7F4"/>
-          </a:solidFill>
-          <a:ln>
-            <a:noFill/>
-          </a:ln>
-          <a:effectLst/>
-        </p:spPr>
-        <p:style>
-          <a:lnRef idx="1">
-            <a:schemeClr val="accent1"/>
-          </a:lnRef>
-          <a:fillRef idx="3">
-            <a:schemeClr val="accent1"/>
-          </a:fillRef>
-          <a:effectRef idx="2">
-            <a:schemeClr val="accent1"/>
-          </a:effectRef>
-          <a:fontRef idx="minor">
-            <a:schemeClr val="lt1"/>
-          </a:fontRef>
-        </p:style>
-        <p:txBody>
-          <a:bodyPr rtlCol="0" anchor="ctr"/>
-          <a:lstStyle/>
-          <a:p>
-            <a:pPr algn="ctr"/>
-          </a:p>
-        </p:txBody>
-      </p:sp>
-      <p:sp>
-        <p:nvSpPr>
-          <p:cNvPr id="3" name="TextBox 2"/>
-          <p:cNvSpPr txBox="1"/>
-          <p:nvPr/>
-        </p:nvSpPr>
-        <p:spPr>
-          <a:xfrm>
-            <a:off x="777240" y="548640"/>
-            <a:ext cx="10607040" cy="822960"/>
-          </a:xfrm>
-          <a:prstGeom prst="rect">
-            <a:avLst/>
-          </a:prstGeom>
-          <a:noFill/>
-        </p:spPr>
-        <p:txBody>
-          <a:bodyPr wrap="square" lIns="0" rIns="0" tIns="0" bIns="0">
-            <a:spAutoFit/>
-          </a:bodyPr>
-          <a:lstStyle/>
-          <a:p>
-            <a:pPr algn="l">
-              <a:spcAft>
-                <a:spcPts val="600"/>
-              </a:spcAft>
-            </a:pPr>
-            <a:r>
-              <a:rPr sz="3400" b="1">
-                <a:solidFill>
-                  <a:srgbClr val="131E19"/>
-                </a:solidFill>
-                <a:latin typeface="Helvetica Neue"/>
-              </a:rPr>
-              <a:t>Ishonchlilik</a:t>
-            </a:r>
-          </a:p>
-        </p:txBody>
-      </p:sp>
-      <p:sp>
-        <p:nvSpPr>
-          <p:cNvPr id="4" name="Rounded Rectangle 3"/>
-          <p:cNvSpPr/>
-          <p:nvPr/>
-        </p:nvSpPr>
-        <p:spPr>
-          <a:xfrm>
-            <a:off x="777240" y="2194560"/>
-            <a:ext cx="3383280" cy="2286000"/>
-          </a:xfrm>
-          <a:prstGeom prst="roundRect">
-            <a:avLst/>
-          </a:prstGeom>
-          <a:solidFill>
-            <a:srgbClr val="FFFFFF"/>
-          </a:solidFill>
-          <a:ln w="9525">
-            <a:solidFill>
-              <a:srgbClr val="D9E0DA"/>
-            </a:solidFill>
-          </a:ln>
-          <a:effectLst/>
-        </p:spPr>
-        <p:style>
-          <a:lnRef idx="1">
-            <a:schemeClr val="accent1"/>
-          </a:lnRef>
-          <a:fillRef idx="3">
-            <a:schemeClr val="accent1"/>
-          </a:fillRef>
-          <a:effectRef idx="2">
-            <a:schemeClr val="accent1"/>
-          </a:effectRef>
-          <a:fontRef idx="minor">
-            <a:schemeClr val="lt1"/>
-          </a:fontRef>
-        </p:style>
-        <p:txBody>
-          <a:bodyPr rtlCol="0" anchor="ctr"/>
-          <a:lstStyle/>
-          <a:p>
-            <a:pPr algn="ctr"/>
-          </a:p>
-        </p:txBody>
-      </p:sp>
-      <p:sp>
-        <p:nvSpPr>
-          <p:cNvPr id="5" name="Rounded Rectangle 4"/>
-          <p:cNvSpPr/>
-          <p:nvPr/>
-        </p:nvSpPr>
-        <p:spPr>
-          <a:xfrm>
-            <a:off x="777240" y="2194560"/>
-            <a:ext cx="64008" cy="2286000"/>
-          </a:xfrm>
-          <a:prstGeom prst="roundRect">
-            <a:avLst/>
-          </a:prstGeom>
-          <a:solidFill>
-            <a:srgbClr val="0E6B58"/>
-          </a:solidFill>
-          <a:ln>
-            <a:noFill/>
-          </a:ln>
-          <a:effectLst/>
-        </p:spPr>
-        <p:style>
-          <a:lnRef idx="1">
-            <a:schemeClr val="accent1"/>
-          </a:lnRef>
-          <a:fillRef idx="3">
-            <a:schemeClr val="accent1"/>
-          </a:fillRef>
-          <a:effectRef idx="2">
-            <a:schemeClr val="accent1"/>
-          </a:effectRef>
-          <a:fontRef idx="minor">
-            <a:schemeClr val="lt1"/>
-          </a:fontRef>
-        </p:style>
-        <p:txBody>
-          <a:bodyPr rtlCol="0" anchor="ctr"/>
-          <a:lstStyle/>
-          <a:p>
-            <a:pPr algn="ctr"/>
-          </a:p>
-        </p:txBody>
-      </p:sp>
-      <p:sp>
-        <p:nvSpPr>
-          <p:cNvPr id="6" name="TextBox 5"/>
-          <p:cNvSpPr txBox="1"/>
-          <p:nvPr/>
-        </p:nvSpPr>
-        <p:spPr>
-          <a:xfrm>
-            <a:off x="1143000" y="2560320"/>
-            <a:ext cx="2743200" cy="731520"/>
-          </a:xfrm>
-          <a:prstGeom prst="rect">
-            <a:avLst/>
-          </a:prstGeom>
-          <a:noFill/>
-        </p:spPr>
-        <p:txBody>
-          <a:bodyPr wrap="square" lIns="0" rIns="0" tIns="0" bIns="0">
-            <a:spAutoFit/>
-          </a:bodyPr>
-          <a:lstStyle/>
-          <a:p>
-            <a:pPr algn="l">
-              <a:spcAft>
-                <a:spcPts val="600"/>
-              </a:spcAft>
-            </a:pPr>
-            <a:r>
-              <a:rPr sz="3800" b="1">
-                <a:solidFill>
-                  <a:srgbClr val="0E6B58"/>
-                </a:solidFill>
-                <a:latin typeface="Helvetica Neue"/>
-              </a:rPr>
-              <a:t>51</a:t>
-            </a:r>
-          </a:p>
-        </p:txBody>
-      </p:sp>
-      <p:sp>
-        <p:nvSpPr>
-          <p:cNvPr id="7" name="TextBox 6"/>
-          <p:cNvSpPr txBox="1"/>
-          <p:nvPr/>
-        </p:nvSpPr>
-        <p:spPr>
-          <a:xfrm>
-            <a:off x="1143000" y="3291840"/>
-            <a:ext cx="2743200" cy="365760"/>
-          </a:xfrm>
-          <a:prstGeom prst="rect">
-            <a:avLst/>
-          </a:prstGeom>
-          <a:noFill/>
-        </p:spPr>
-        <p:txBody>
-          <a:bodyPr wrap="square" lIns="0" rIns="0" tIns="0" bIns="0">
-            <a:spAutoFit/>
-          </a:bodyPr>
-          <a:lstStyle/>
-          <a:p>
-            <a:pPr algn="l">
-              <a:spcAft>
-                <a:spcPts val="600"/>
-              </a:spcAft>
-            </a:pPr>
-            <a:r>
-              <a:rPr sz="1700" b="1">
-                <a:solidFill>
-                  <a:srgbClr val="131E19"/>
-                </a:solidFill>
-                <a:latin typeface="Helvetica Neue"/>
-              </a:rPr>
-              <a:t>avtomatik test</a:t>
-            </a:r>
-          </a:p>
-        </p:txBody>
-      </p:sp>
-      <p:sp>
-        <p:nvSpPr>
-          <p:cNvPr id="8" name="TextBox 7"/>
-          <p:cNvSpPr txBox="1"/>
-          <p:nvPr/>
-        </p:nvSpPr>
-        <p:spPr>
-          <a:xfrm>
-            <a:off x="1143000" y="3703320"/>
-            <a:ext cx="2743200" cy="640080"/>
-          </a:xfrm>
-          <a:prstGeom prst="rect">
-            <a:avLst/>
-          </a:prstGeom>
-          <a:noFill/>
-        </p:spPr>
-        <p:txBody>
-          <a:bodyPr wrap="square" lIns="0" rIns="0" tIns="0" bIns="0">
-            <a:spAutoFit/>
-          </a:bodyPr>
-          <a:lstStyle/>
-          <a:p>
-            <a:pPr algn="l">
-              <a:spcAft>
-                <a:spcPts val="600"/>
-              </a:spcAft>
-            </a:pPr>
-            <a:r>
-              <a:rPr sz="1300" b="0">
-                <a:solidFill>
-                  <a:srgbClr val="6E7D76"/>
-                </a:solidFill>
-                <a:latin typeface="Helvetica Neue"/>
-              </a:rPr>
-              <a:t>Har biri topilgan xatoni qaytishidan saqlaydi</a:t>
-            </a:r>
-          </a:p>
-        </p:txBody>
-      </p:sp>
-      <p:sp>
-        <p:nvSpPr>
-          <p:cNvPr id="9" name="Rounded Rectangle 8"/>
-          <p:cNvSpPr/>
-          <p:nvPr/>
-        </p:nvSpPr>
-        <p:spPr>
-          <a:xfrm>
-            <a:off x="4389120" y="2194560"/>
-            <a:ext cx="3383280" cy="2286000"/>
-          </a:xfrm>
-          <a:prstGeom prst="roundRect">
-            <a:avLst/>
-          </a:prstGeom>
-          <a:solidFill>
-            <a:srgbClr val="FFFFFF"/>
-          </a:solidFill>
-          <a:ln w="9525">
-            <a:solidFill>
-              <a:srgbClr val="D9E0DA"/>
-            </a:solidFill>
-          </a:ln>
-          <a:effectLst/>
-        </p:spPr>
-        <p:style>
-          <a:lnRef idx="1">
-            <a:schemeClr val="accent1"/>
-          </a:lnRef>
-          <a:fillRef idx="3">
-            <a:schemeClr val="accent1"/>
-          </a:fillRef>
-          <a:effectRef idx="2">
-            <a:schemeClr val="accent1"/>
-          </a:effectRef>
-          <a:fontRef idx="minor">
-            <a:schemeClr val="lt1"/>
-          </a:fontRef>
-        </p:style>
-        <p:txBody>
-          <a:bodyPr rtlCol="0" anchor="ctr"/>
-          <a:lstStyle/>
-          <a:p>
-            <a:pPr algn="ctr"/>
-          </a:p>
-        </p:txBody>
-      </p:sp>
-      <p:sp>
-        <p:nvSpPr>
-          <p:cNvPr id="10" name="Rounded Rectangle 9"/>
-          <p:cNvSpPr/>
-          <p:nvPr/>
-        </p:nvSpPr>
-        <p:spPr>
-          <a:xfrm>
-            <a:off x="4389120" y="2194560"/>
-            <a:ext cx="64008" cy="2286000"/>
-          </a:xfrm>
-          <a:prstGeom prst="roundRect">
-            <a:avLst/>
-          </a:prstGeom>
-          <a:solidFill>
-            <a:srgbClr val="0E6B58"/>
-          </a:solidFill>
-          <a:ln>
-            <a:noFill/>
-          </a:ln>
-          <a:effectLst/>
-        </p:spPr>
-        <p:style>
-          <a:lnRef idx="1">
-            <a:schemeClr val="accent1"/>
-          </a:lnRef>
-          <a:fillRef idx="3">
-            <a:schemeClr val="accent1"/>
-          </a:fillRef>
-          <a:effectRef idx="2">
-            <a:schemeClr val="accent1"/>
-          </a:effectRef>
-          <a:fontRef idx="minor">
-            <a:schemeClr val="lt1"/>
-          </a:fontRef>
-        </p:style>
-        <p:txBody>
-          <a:bodyPr rtlCol="0" anchor="ctr"/>
-          <a:lstStyle/>
-          <a:p>
-            <a:pPr algn="ctr"/>
-          </a:p>
-        </p:txBody>
-      </p:sp>
-      <p:sp>
-        <p:nvSpPr>
-          <p:cNvPr id="11" name="TextBox 10"/>
-          <p:cNvSpPr txBox="1"/>
-          <p:nvPr/>
-        </p:nvSpPr>
-        <p:spPr>
-          <a:xfrm>
-            <a:off x="4754880" y="2560320"/>
-            <a:ext cx="2743200" cy="731520"/>
-          </a:xfrm>
-          <a:prstGeom prst="rect">
-            <a:avLst/>
-          </a:prstGeom>
-          <a:noFill/>
-        </p:spPr>
-        <p:txBody>
-          <a:bodyPr wrap="square" lIns="0" rIns="0" tIns="0" bIns="0">
-            <a:spAutoFit/>
-          </a:bodyPr>
-          <a:lstStyle/>
-          <a:p>
-            <a:pPr algn="l">
-              <a:spcAft>
-                <a:spcPts val="600"/>
-              </a:spcAft>
-            </a:pPr>
-            <a:r>
-              <a:rPr sz="3800" b="1">
-                <a:solidFill>
-                  <a:srgbClr val="0E6B58"/>
-                </a:solidFill>
-                <a:latin typeface="Helvetica Neue"/>
-              </a:rPr>
-              <a:t>100%</a:t>
-            </a:r>
-          </a:p>
-        </p:txBody>
-      </p:sp>
-      <p:sp>
-        <p:nvSpPr>
-          <p:cNvPr id="12" name="TextBox 11"/>
-          <p:cNvSpPr txBox="1"/>
-          <p:nvPr/>
-        </p:nvSpPr>
-        <p:spPr>
-          <a:xfrm>
-            <a:off x="4754880" y="3291840"/>
-            <a:ext cx="2743200" cy="365760"/>
-          </a:xfrm>
-          <a:prstGeom prst="rect">
-            <a:avLst/>
-          </a:prstGeom>
-          <a:noFill/>
-        </p:spPr>
-        <p:txBody>
-          <a:bodyPr wrap="square" lIns="0" rIns="0" tIns="0" bIns="0">
-            <a:spAutoFit/>
-          </a:bodyPr>
-          <a:lstStyle/>
-          <a:p>
-            <a:pPr algn="l">
-              <a:spcAft>
-                <a:spcPts val="600"/>
-              </a:spcAft>
-            </a:pPr>
-            <a:r>
-              <a:rPr sz="1700" b="1">
-                <a:solidFill>
-                  <a:srgbClr val="131E19"/>
-                </a:solidFill>
-                <a:latin typeface="Helvetica Neue"/>
-              </a:rPr>
-              <a:t>shifokor nazorati</a:t>
-            </a:r>
-          </a:p>
-        </p:txBody>
-      </p:sp>
-      <p:sp>
-        <p:nvSpPr>
-          <p:cNvPr id="13" name="TextBox 12"/>
-          <p:cNvSpPr txBox="1"/>
-          <p:nvPr/>
-        </p:nvSpPr>
-        <p:spPr>
-          <a:xfrm>
-            <a:off x="4754880" y="3703320"/>
-            <a:ext cx="2743200" cy="640080"/>
-          </a:xfrm>
-          <a:prstGeom prst="rect">
-            <a:avLst/>
-          </a:prstGeom>
-          <a:noFill/>
-        </p:spPr>
-        <p:txBody>
-          <a:bodyPr wrap="square" lIns="0" rIns="0" tIns="0" bIns="0">
-            <a:spAutoFit/>
-          </a:bodyPr>
-          <a:lstStyle/>
-          <a:p>
-            <a:pPr algn="l">
-              <a:spcAft>
-                <a:spcPts val="600"/>
-              </a:spcAft>
-            </a:pPr>
-            <a:r>
-              <a:rPr sz="1300" b="0">
-                <a:solidFill>
-                  <a:srgbClr val="6E7D76"/>
-                </a:solidFill>
-                <a:latin typeface="Helvetica Neue"/>
-              </a:rPr>
-              <a:t>Past ishonchli taklif o'zi yoqilmaydi</a:t>
-            </a:r>
-          </a:p>
-        </p:txBody>
-      </p:sp>
-      <p:sp>
-        <p:nvSpPr>
-          <p:cNvPr id="14" name="Rounded Rectangle 13"/>
-          <p:cNvSpPr/>
-          <p:nvPr/>
-        </p:nvSpPr>
-        <p:spPr>
-          <a:xfrm>
-            <a:off x="8001000" y="2194560"/>
-            <a:ext cx="3383280" cy="2286000"/>
-          </a:xfrm>
-          <a:prstGeom prst="roundRect">
-            <a:avLst/>
-          </a:prstGeom>
-          <a:solidFill>
-            <a:srgbClr val="FFFFFF"/>
-          </a:solidFill>
-          <a:ln w="9525">
-            <a:solidFill>
-              <a:srgbClr val="D9E0DA"/>
-            </a:solidFill>
-          </a:ln>
-          <a:effectLst/>
-        </p:spPr>
-        <p:style>
-          <a:lnRef idx="1">
-            <a:schemeClr val="accent1"/>
-          </a:lnRef>
-          <a:fillRef idx="3">
-            <a:schemeClr val="accent1"/>
-          </a:fillRef>
-          <a:effectRef idx="2">
-            <a:schemeClr val="accent1"/>
-          </a:effectRef>
-          <a:fontRef idx="minor">
-            <a:schemeClr val="lt1"/>
-          </a:fontRef>
-        </p:style>
-        <p:txBody>
-          <a:bodyPr rtlCol="0" anchor="ctr"/>
-          <a:lstStyle/>
-          <a:p>
-            <a:pPr algn="ctr"/>
-          </a:p>
-        </p:txBody>
-      </p:sp>
-      <p:sp>
-        <p:nvSpPr>
-          <p:cNvPr id="15" name="Rounded Rectangle 14"/>
-          <p:cNvSpPr/>
-          <p:nvPr/>
-        </p:nvSpPr>
-        <p:spPr>
-          <a:xfrm>
-            <a:off x="8001000" y="2194560"/>
-            <a:ext cx="64008" cy="2286000"/>
-          </a:xfrm>
-          <a:prstGeom prst="roundRect">
-            <a:avLst/>
-          </a:prstGeom>
-          <a:solidFill>
-            <a:srgbClr val="0E6B58"/>
-          </a:solidFill>
-          <a:ln>
-            <a:noFill/>
-          </a:ln>
-          <a:effectLst/>
-        </p:spPr>
-        <p:style>
-          <a:lnRef idx="1">
-            <a:schemeClr val="accent1"/>
-          </a:lnRef>
-          <a:fillRef idx="3">
-            <a:schemeClr val="accent1"/>
-          </a:fillRef>
-          <a:effectRef idx="2">
-            <a:schemeClr val="accent1"/>
-          </a:effectRef>
-          <a:fontRef idx="minor">
-            <a:schemeClr val="lt1"/>
-          </a:fontRef>
-        </p:style>
-        <p:txBody>
-          <a:bodyPr rtlCol="0" anchor="ctr"/>
-          <a:lstStyle/>
-          <a:p>
-            <a:pPr algn="ctr"/>
-          </a:p>
-        </p:txBody>
-      </p:sp>
-      <p:sp>
-        <p:nvSpPr>
-          <p:cNvPr id="16" name="TextBox 15"/>
-          <p:cNvSpPr txBox="1"/>
-          <p:nvPr/>
-        </p:nvSpPr>
-        <p:spPr>
-          <a:xfrm>
-            <a:off x="8366760" y="2560320"/>
-            <a:ext cx="2743200" cy="731520"/>
-          </a:xfrm>
-          <a:prstGeom prst="rect">
-            <a:avLst/>
-          </a:prstGeom>
-          <a:noFill/>
-        </p:spPr>
-        <p:txBody>
-          <a:bodyPr wrap="square" lIns="0" rIns="0" tIns="0" bIns="0">
-            <a:spAutoFit/>
-          </a:bodyPr>
-          <a:lstStyle/>
-          <a:p>
-            <a:pPr algn="l">
-              <a:spcAft>
-                <a:spcPts val="600"/>
+                <a:spcPts val="700"/>
               </a:spcAft>
             </a:pPr>
             <a:r>
@@ -6491,7 +5800,7 @@
         </p:nvSpPr>
         <p:spPr>
           <a:xfrm>
-            <a:off x="8366760" y="3291840"/>
+            <a:off x="8385048" y="3364992"/>
             <a:ext cx="2743200" cy="365760"/>
           </a:xfrm>
           <a:prstGeom prst="rect">
@@ -6507,7 +5816,7 @@
           <a:p>
             <a:pPr algn="l">
               <a:spcAft>
-                <a:spcPts val="600"/>
+                <a:spcPts val="700"/>
               </a:spcAft>
             </a:pPr>
             <a:r>
@@ -6530,7 +5839,7 @@
         </p:nvSpPr>
         <p:spPr>
           <a:xfrm>
-            <a:off x="8366760" y="3703320"/>
+            <a:off x="8385048" y="3767328"/>
             <a:ext cx="2743200" cy="640080"/>
           </a:xfrm>
           <a:prstGeom prst="rect">
@@ -6546,7 +5855,7 @@
           <a:p>
             <a:pPr algn="l">
               <a:spcAft>
-                <a:spcPts val="600"/>
+                <a:spcPts val="700"/>
               </a:spcAft>
             </a:pPr>
             <a:r>
@@ -6556,7 +5865,7 @@
                 </a:solidFill>
                 <a:latin typeface="Helvetica Neue"/>
               </a:rPr>
-              <a:t>Audio ham, matn ham qurilmadan chiqmaydi</a:t>
+              <a:t>Audio ham, matn ham qurilmada qoladi</a:t>
             </a:r>
           </a:p>
         </p:txBody>
@@ -6569,7 +5878,7 @@
         </p:nvSpPr>
         <p:spPr>
           <a:xfrm>
-            <a:off x="777240" y="5029200"/>
+            <a:off x="777240" y="5074920"/>
             <a:ext cx="10607040" cy="914400"/>
           </a:xfrm>
           <a:prstGeom prst="rect">
@@ -6585,17 +5894,56 @@
           <a:p>
             <a:pPr algn="l">
               <a:spcAft>
-                <a:spcPts val="600"/>
+                <a:spcPts val="700"/>
               </a:spcAft>
             </a:pPr>
             <a:r>
-              <a:rPr sz="1900" b="0">
+              <a:rPr sz="2000" b="0">
                 <a:solidFill>
                   <a:srgbClr val="131E19"/>
                 </a:solidFill>
                 <a:latin typeface="Helvetica Neue"/>
               </a:rPr>
-              <a:t>Xato topilganda test yoziladi. Shuning uchun bir marta tuzatilgan narsa qaytib kelmaydi.</a:t>
+              <a:t>Ovozdan formagacha bo'lgan butun yo'l tayyor va sinovdan o'tgan.</a:t>
+            </a:r>
+          </a:p>
+        </p:txBody>
+      </p:sp>
+      <p:sp>
+        <p:nvSpPr>
+          <p:cNvPr id="20" name="TextBox 19"/>
+          <p:cNvSpPr txBox="1"/>
+          <p:nvPr/>
+        </p:nvSpPr>
+        <p:spPr>
+          <a:xfrm>
+            <a:off x="777240" y="6035040"/>
+            <a:ext cx="10607040" cy="365760"/>
+          </a:xfrm>
+          <a:prstGeom prst="rect">
+            <a:avLst/>
+          </a:prstGeom>
+          <a:noFill/>
+        </p:spPr>
+        <p:txBody>
+          <a:bodyPr wrap="square" lIns="0" rIns="0" tIns="0" bIns="0">
+            <a:spAutoFit/>
+          </a:bodyPr>
+          <a:lstStyle/>
+          <a:p>
+            <a:pPr algn="l">
+              <a:spcAft>
+                <a:spcPts val="700"/>
+              </a:spcAft>
+            </a:pPr>
+            <a:r>
+              <a:rPr sz="1500" b="1">
+                <a:solidFill>
+                  <a:srgbClr val="0E6B58"/>
+                </a:solidFill>
+                <a:latin typeface="Helvetica Neue"/>
+              </a:rPr>
+              <a:t>github.com/VohidovTohirjon/voice-to-text-openemr</a:t>
             </a:r>
           </a:p>
         </p:txBody>

--- a/docs/OpenEMR-ovozli-yozuv.pptx
+++ b/docs/OpenEMR-ovozli-yozuv.pptx
@@ -11,6 +11,7 @@
     <p:sldId id="259" r:id="rId10"/>
     <p:sldId id="260" r:id="rId11"/>
     <p:sldId id="261" r:id="rId12"/>
+    <p:sldId id="262" r:id="rId13"/>
   </p:sldIdLst>
   <p:sldSz cx="12191695" cy="6858000" type="screen4x3"/>
   <p:notesSz cx="6858000" cy="9144000"/>
@@ -3379,7 +3380,7 @@
         </p:nvSpPr>
         <p:spPr>
           <a:xfrm>
-            <a:off x="777240" y="566928"/>
+            <a:off x="777240" y="548640"/>
             <a:ext cx="10607040" cy="822960"/>
           </a:xfrm>
           <a:prstGeom prst="rect">
@@ -3399,7 +3400,7 @@
               </a:spcAft>
             </a:pPr>
             <a:r>
-              <a:rPr sz="3300" b="1">
+              <a:rPr sz="3200" b="1">
                 <a:solidFill>
                   <a:srgbClr val="131E19"/>
                 </a:solidFill>
@@ -3418,7 +3419,7 @@
         </p:nvSpPr>
         <p:spPr>
           <a:xfrm>
-            <a:off x="777240" y="1316736"/>
+            <a:off x="777240" y="1280160"/>
             <a:ext cx="10607040" cy="548640"/>
           </a:xfrm>
           <a:prstGeom prst="rect">
@@ -3444,7 +3445,7 @@
                 </a:solidFill>
                 <a:latin typeface="Helvetica Neue"/>
               </a:rPr>
-              <a:t>Bitta dikta, to'liq to'ldirilgan encounter formasi</a:t>
+              <a:t>Bitta dikta, tayyor klinik ma'lumot</a:t>
             </a:r>
           </a:p>
         </p:txBody>
@@ -3457,8 +3458,8 @@
         </p:nvSpPr>
         <p:spPr>
           <a:xfrm>
-            <a:off x="777240" y="2286000"/>
-            <a:ext cx="2468880" cy="1920240"/>
+            <a:off x="777240" y="2057400"/>
+            <a:ext cx="2971800" cy="1188720"/>
           </a:xfrm>
           <a:prstGeom prst="roundRect">
             <a:avLst/>
@@ -3503,8 +3504,8 @@
         </p:nvSpPr>
         <p:spPr>
           <a:xfrm>
-            <a:off x="777240" y="2286000"/>
-            <a:ext cx="64008" cy="1920240"/>
+            <a:off x="777240" y="2057400"/>
+            <a:ext cx="64008" cy="1188720"/>
           </a:xfrm>
           <a:prstGeom prst="roundRect">
             <a:avLst/>
@@ -3547,8 +3548,8 @@
         </p:nvSpPr>
         <p:spPr>
           <a:xfrm>
-            <a:off x="1124712" y="2633472"/>
-            <a:ext cx="2011680" cy="731520"/>
+            <a:off x="1097280" y="2240280"/>
+            <a:ext cx="2377440" cy="548640"/>
           </a:xfrm>
           <a:prstGeom prst="rect">
             <a:avLst/>
@@ -3567,13 +3568,13 @@
               </a:spcAft>
             </a:pPr>
             <a:r>
-              <a:rPr sz="4000" b="1">
+              <a:rPr sz="3200" b="1">
                 <a:solidFill>
                   <a:srgbClr val="0E6B58"/>
                 </a:solidFill>
                 <a:latin typeface="Helvetica Neue"/>
               </a:rPr>
-              <a:t>11</a:t>
+              <a:t>10</a:t>
             </a:r>
           </a:p>
         </p:txBody>
@@ -3586,8 +3587,8 @@
         </p:nvSpPr>
         <p:spPr>
           <a:xfrm>
-            <a:off x="1124712" y="3401568"/>
-            <a:ext cx="2011680" cy="640080"/>
+            <a:off x="1097280" y="2807208"/>
+            <a:ext cx="2377440" cy="365760"/>
           </a:xfrm>
           <a:prstGeom prst="rect">
             <a:avLst/>
@@ -3612,7 +3613,7 @@
                 </a:solidFill>
                 <a:latin typeface="Helvetica Neue"/>
               </a:rPr>
-              <a:t>maydon bitta diktadan</a:t>
+              <a:t>qiymat ajratildi</a:t>
             </a:r>
           </a:p>
         </p:txBody>
@@ -3625,8 +3626,8 @@
         </p:nvSpPr>
         <p:spPr>
           <a:xfrm>
-            <a:off x="3474720" y="2286000"/>
-            <a:ext cx="2468880" cy="1920240"/>
+            <a:off x="3977639" y="2057400"/>
+            <a:ext cx="2971800" cy="1188720"/>
           </a:xfrm>
           <a:prstGeom prst="roundRect">
             <a:avLst/>
@@ -3671,8 +3672,8 @@
         </p:nvSpPr>
         <p:spPr>
           <a:xfrm>
-            <a:off x="3474720" y="2286000"/>
-            <a:ext cx="64008" cy="1920240"/>
+            <a:off x="3977639" y="2057400"/>
+            <a:ext cx="64008" cy="1188720"/>
           </a:xfrm>
           <a:prstGeom prst="roundRect">
             <a:avLst/>
@@ -3715,8 +3716,8 @@
         </p:nvSpPr>
         <p:spPr>
           <a:xfrm>
-            <a:off x="3822192" y="2633472"/>
-            <a:ext cx="2011680" cy="731520"/>
+            <a:off x="4297679" y="2240280"/>
+            <a:ext cx="2377440" cy="548640"/>
           </a:xfrm>
           <a:prstGeom prst="rect">
             <a:avLst/>
@@ -3735,13 +3736,13 @@
               </a:spcAft>
             </a:pPr>
             <a:r>
-              <a:rPr sz="4000" b="1">
+              <a:rPr sz="3200" b="1">
                 <a:solidFill>
                   <a:srgbClr val="0E6B58"/>
                 </a:solidFill>
                 <a:latin typeface="Helvetica Neue"/>
               </a:rPr>
-              <a:t>88%</a:t>
+              <a:t>96 ms</a:t>
             </a:r>
           </a:p>
         </p:txBody>
@@ -3754,8 +3755,8 @@
         </p:nvSpPr>
         <p:spPr>
           <a:xfrm>
-            <a:off x="3822192" y="3401568"/>
-            <a:ext cx="2011680" cy="640080"/>
+            <a:off x="4297679" y="2807208"/>
+            <a:ext cx="2377440" cy="365760"/>
           </a:xfrm>
           <a:prstGeom prst="rect">
             <a:avLst/>
@@ -3780,7 +3781,7 @@
                 </a:solidFill>
                 <a:latin typeface="Helvetica Neue"/>
               </a:rPr>
-              <a:t>dori nomlari to'g'ri tanildi</a:t>
+              <a:t>tahlil vaqti</a:t>
             </a:r>
           </a:p>
         </p:txBody>
@@ -3793,8 +3794,8 @@
         </p:nvSpPr>
         <p:spPr>
           <a:xfrm>
-            <a:off x="6172200" y="2286000"/>
-            <a:ext cx="2468880" cy="1920240"/>
+            <a:off x="777240" y="3474720"/>
+            <a:ext cx="2971800" cy="1188720"/>
           </a:xfrm>
           <a:prstGeom prst="roundRect">
             <a:avLst/>
@@ -3839,8 +3840,8 @@
         </p:nvSpPr>
         <p:spPr>
           <a:xfrm>
-            <a:off x="6172200" y="2286000"/>
-            <a:ext cx="64008" cy="1920240"/>
+            <a:off x="777240" y="3474720"/>
+            <a:ext cx="64008" cy="1188720"/>
           </a:xfrm>
           <a:prstGeom prst="roundRect">
             <a:avLst/>
@@ -3883,8 +3884,8 @@
         </p:nvSpPr>
         <p:spPr>
           <a:xfrm>
-            <a:off x="6519672" y="2633472"/>
-            <a:ext cx="2011680" cy="731520"/>
+            <a:off x="1097280" y="3657600"/>
+            <a:ext cx="2377440" cy="548640"/>
           </a:xfrm>
           <a:prstGeom prst="rect">
             <a:avLst/>
@@ -3903,13 +3904,13 @@
               </a:spcAft>
             </a:pPr>
             <a:r>
-              <a:rPr sz="4000" b="1">
+              <a:rPr sz="3200" b="1">
                 <a:solidFill>
                   <a:srgbClr val="0E6B58"/>
                 </a:solidFill>
                 <a:latin typeface="Helvetica Neue"/>
               </a:rPr>
-              <a:t>30 ms</a:t>
+              <a:t>88%</a:t>
             </a:r>
           </a:p>
         </p:txBody>
@@ -3922,8 +3923,8 @@
         </p:nvSpPr>
         <p:spPr>
           <a:xfrm>
-            <a:off x="6519672" y="3401568"/>
-            <a:ext cx="2011680" cy="640080"/>
+            <a:off x="1097280" y="4224528"/>
+            <a:ext cx="2377440" cy="365760"/>
           </a:xfrm>
           <a:prstGeom prst="rect">
             <a:avLst/>
@@ -3948,7 +3949,7 @@
                 </a:solidFill>
                 <a:latin typeface="Helvetica Neue"/>
               </a:rPr>
-              <a:t>tahlil vaqti</a:t>
+              <a:t>dori nomlari to'g'ri</a:t>
             </a:r>
           </a:p>
         </p:txBody>
@@ -3961,8 +3962,8 @@
         </p:nvSpPr>
         <p:spPr>
           <a:xfrm>
-            <a:off x="8869680" y="2286000"/>
-            <a:ext cx="2468880" cy="1920240"/>
+            <a:off x="3977639" y="3474720"/>
+            <a:ext cx="2971800" cy="1188720"/>
           </a:xfrm>
           <a:prstGeom prst="roundRect">
             <a:avLst/>
@@ -4007,8 +4008,8 @@
         </p:nvSpPr>
         <p:spPr>
           <a:xfrm>
-            <a:off x="8869680" y="2286000"/>
-            <a:ext cx="64008" cy="1920240"/>
+            <a:off x="3977639" y="3474720"/>
+            <a:ext cx="64008" cy="1188720"/>
           </a:xfrm>
           <a:prstGeom prst="roundRect">
             <a:avLst/>
@@ -4051,8 +4052,8 @@
         </p:nvSpPr>
         <p:spPr>
           <a:xfrm>
-            <a:off x="9217152" y="2633472"/>
-            <a:ext cx="2011680" cy="731520"/>
+            <a:off x="4297679" y="3657600"/>
+            <a:ext cx="2377440" cy="548640"/>
           </a:xfrm>
           <a:prstGeom prst="rect">
             <a:avLst/>
@@ -4071,7 +4072,7 @@
               </a:spcAft>
             </a:pPr>
             <a:r>
-              <a:rPr sz="4000" b="1">
+              <a:rPr sz="3200" b="1">
                 <a:solidFill>
                   <a:srgbClr val="0E6B58"/>
                 </a:solidFill>
@@ -4090,8 +4091,8 @@
         </p:nvSpPr>
         <p:spPr>
           <a:xfrm>
-            <a:off x="9217152" y="3401568"/>
-            <a:ext cx="2011680" cy="640080"/>
+            <a:off x="4297679" y="4224528"/>
+            <a:ext cx="2377440" cy="365760"/>
           </a:xfrm>
           <a:prstGeom prst="rect">
             <a:avLst/>
@@ -4116,7 +4117,7 @@
                 </a:solidFill>
                 <a:latin typeface="Helvetica Neue"/>
               </a:rPr>
-              <a:t>bulutga yuborilgan ma'lumot</a:t>
+              <a:t>bulutga yuborildi</a:t>
             </a:r>
           </a:p>
         </p:txBody>
@@ -4129,8 +4130,8 @@
         </p:nvSpPr>
         <p:spPr>
           <a:xfrm>
-            <a:off x="777240" y="4846320"/>
-            <a:ext cx="10607040" cy="1280160"/>
+            <a:off x="777240" y="5120640"/>
+            <a:ext cx="6400800" cy="1188720"/>
           </a:xfrm>
           <a:prstGeom prst="rect">
             <a:avLst/>
@@ -4149,13 +4150,13 @@
               </a:spcAft>
             </a:pPr>
             <a:r>
-              <a:rPr sz="2000" b="0">
+              <a:rPr sz="1800" b="0">
                 <a:solidFill>
                   <a:srgbClr val="131E19"/>
                 </a:solidFill>
                 <a:latin typeface="Helvetica Neue"/>
               </a:rPr>
-              <a:t>SOAP bo'limlari, ko'rsatkichlar va tashxis kodi bir marta gapirishdan to'ladi.</a:t>
+              <a:t>Shifokor bir marta gapiradi. Tizim shikoyat, ko'rsatkichlar va tashxis</a:t>
             </a:r>
           </a:p>
           <a:p>
@@ -4165,17 +4166,87 @@
               </a:spcAft>
             </a:pPr>
             <a:r>
-              <a:rPr sz="2000" b="0">
+              <a:rPr sz="1800" b="0">
                 <a:solidFill>
                   <a:srgbClr val="131E19"/>
                 </a:solidFill>
                 <a:latin typeface="Helvetica Neue"/>
               </a:rPr>
-              <a:t>Shifokor tasdiqlamaguncha kartaga hech narsa yozilmaydi.</a:t>
-            </a:r>
-          </a:p>
-        </p:txBody>
-      </p:sp>
+              <a:t>kodini ajratib beradi, lekin tasdiqlanmaguncha hech narsa yozmaydi.</a:t>
+            </a:r>
+          </a:p>
+        </p:txBody>
+      </p:sp>
+      <p:sp>
+        <p:nvSpPr>
+          <p:cNvPr id="22" name="Rounded Rectangle 21"/>
+          <p:cNvSpPr/>
+          <p:nvPr/>
+        </p:nvSpPr>
+        <p:spPr>
+          <a:xfrm>
+            <a:off x="7726680" y="2042808"/>
+            <a:ext cx="3657600" cy="3961102"/>
+          </a:xfrm>
+          <a:prstGeom prst="roundRect">
+            <a:avLst/>
+          </a:prstGeom>
+          <a:solidFill>
+            <a:srgbClr val="FFFFFF"/>
+          </a:solidFill>
+          <a:ln w="9525">
+            <a:solidFill>
+              <a:srgbClr val="D9E0DA"/>
+            </a:solidFill>
+          </a:ln>
+          <a:effectLst/>
+        </p:spPr>
+        <p:style>
+          <a:lnRef idx="1">
+            <a:schemeClr val="accent1"/>
+          </a:lnRef>
+          <a:fillRef idx="3">
+            <a:schemeClr val="accent1"/>
+          </a:fillRef>
+          <a:effectRef idx="2">
+            <a:schemeClr val="accent1"/>
+          </a:effectRef>
+          <a:fontRef idx="minor">
+            <a:schemeClr val="lt1"/>
+          </a:fontRef>
+        </p:style>
+        <p:txBody>
+          <a:bodyPr rtlCol="0" anchor="ctr"/>
+          <a:lstStyle/>
+          <a:p>
+            <a:pPr algn="ctr"/>
+          </a:p>
+        </p:txBody>
+      </p:sp>
+      <p:pic>
+        <p:nvPicPr>
+          <p:cNvPr id="23" name="Picture 22" descr="ekran-transkript.png"/>
+          <p:cNvPicPr>
+            <a:picLocks noChangeAspect="1"/>
+          </p:cNvPicPr>
+          <p:nvPr/>
+        </p:nvPicPr>
+        <p:blipFill>
+          <a:blip r:embed="rId2"/>
+          <a:stretch>
+            <a:fillRect/>
+          </a:stretch>
+        </p:blipFill>
+        <p:spPr>
+          <a:xfrm>
+            <a:off x="7772400" y="2088528"/>
+            <a:ext cx="3566160" cy="3869662"/>
+          </a:xfrm>
+          <a:prstGeom prst="rect">
+            <a:avLst/>
+          </a:prstGeom>
+        </p:spPr>
+      </p:pic>
     </p:spTree>
   </p:cSld>
   <p:clrMapOvr>
@@ -4246,7 +4317,7 @@
         </p:nvSpPr>
         <p:spPr>
           <a:xfrm>
-            <a:off x="777240" y="566928"/>
+            <a:off x="777240" y="548640"/>
             <a:ext cx="10607040" cy="822960"/>
           </a:xfrm>
           <a:prstGeom prst="rect">
@@ -4266,7 +4337,7 @@
               </a:spcAft>
             </a:pPr>
             <a:r>
-              <a:rPr sz="3300" b="1">
+              <a:rPr sz="3200" b="1">
                 <a:solidFill>
                   <a:srgbClr val="131E19"/>
                 </a:solidFill>
@@ -4293,8 +4364,8 @@
         </p:blipFill>
         <p:spPr>
           <a:xfrm>
-            <a:off x="2295144" y="1874519"/>
-            <a:ext cx="7571231" cy="4206240"/>
+            <a:off x="2377439" y="1828800"/>
+            <a:ext cx="7406640" cy="4114800"/>
           </a:xfrm>
           <a:prstGeom prst="rect">
             <a:avLst/>
@@ -4309,7 +4380,7 @@
         </p:nvSpPr>
         <p:spPr>
           <a:xfrm>
-            <a:off x="777240" y="6217920"/>
+            <a:off x="777240" y="6172200"/>
             <a:ext cx="10607040" cy="365760"/>
           </a:xfrm>
           <a:prstGeom prst="rect">
@@ -4410,7 +4481,7 @@
         </p:nvSpPr>
         <p:spPr>
           <a:xfrm>
-            <a:off x="777240" y="566928"/>
+            <a:off x="777240" y="548640"/>
             <a:ext cx="10607040" cy="822960"/>
           </a:xfrm>
           <a:prstGeom prst="rect">
@@ -4430,13 +4501,13 @@
               </a:spcAft>
             </a:pPr>
             <a:r>
-              <a:rPr sz="3300" b="1">
+              <a:rPr sz="3200" b="1">
                 <a:solidFill>
                   <a:srgbClr val="131E19"/>
                 </a:solidFill>
                 <a:latin typeface="Helvetica Neue"/>
               </a:rPr>
-              <a:t>Eng qiyin masala: dori nomlari</a:t>
+              <a:t>Tizim xatoni o'zi topdi</a:t>
             </a:r>
           </a:p>
         </p:txBody>
@@ -4449,7 +4520,7 @@
         </p:nvSpPr>
         <p:spPr>
           <a:xfrm>
-            <a:off x="777240" y="1316736"/>
+            <a:off x="777240" y="1280160"/>
             <a:ext cx="10607040" cy="548640"/>
           </a:xfrm>
           <a:prstGeom prst="rect">
@@ -4475,14 +4546,356 @@
                 </a:solidFill>
                 <a:latin typeface="Helvetica Neue"/>
               </a:rPr>
-              <a:t>Modelni qayta o'qitish oylab vaqt olardi. Dekoderni sozlab hal qildim.</a:t>
-            </a:r>
+              <a:t>Haqiqiy demodan olingan kadr</a:t>
+            </a:r>
+          </a:p>
+        </p:txBody>
+      </p:sp>
+      <p:sp>
+        <p:nvSpPr>
+          <p:cNvPr id="5" name="TextBox 4"/>
+          <p:cNvSpPr txBox="1"/>
+          <p:nvPr/>
+        </p:nvSpPr>
+        <p:spPr>
+          <a:xfrm>
+            <a:off x="777240" y="2103120"/>
+            <a:ext cx="6583680" cy="3108960"/>
+          </a:xfrm>
+          <a:prstGeom prst="rect">
+            <a:avLst/>
+          </a:prstGeom>
+          <a:noFill/>
+        </p:spPr>
+        <p:txBody>
+          <a:bodyPr wrap="square" lIns="0" rIns="0" tIns="0" bIns="0">
+            <a:spAutoFit/>
+          </a:bodyPr>
+          <a:lstStyle/>
+          <a:p>
+            <a:pPr algn="l">
+              <a:spcAft>
+                <a:spcPts val="700"/>
+              </a:spcAft>
+            </a:pPr>
+            <a:r>
+              <a:rPr sz="1900" b="0">
+                <a:solidFill>
+                  <a:srgbClr val="131E19"/>
+                </a:solidFill>
+                <a:latin typeface="Helvetica Neue"/>
+              </a:rPr>
+              <a:t>Qon bosimini aytganimda Whisper uni noto'g'ri yozdi.</a:t>
+            </a:r>
+          </a:p>
+          <a:p>
+            <a:pPr algn="l">
+              <a:spcAft>
+                <a:spcPts val="700"/>
+              </a:spcAft>
+            </a:pPr>
+            <a:r>
+              <a:rPr sz="1900" b="0">
+                <a:solidFill>
+                  <a:srgbClr val="131E19"/>
+                </a:solidFill>
+                <a:latin typeface="Helvetica Neue"/>
+              </a:rPr>
+              <a:t/>
+            </a:r>
+          </a:p>
+          <a:p>
+            <a:pPr algn="l">
+              <a:spcAft>
+                <a:spcPts val="700"/>
+              </a:spcAft>
+            </a:pPr>
+            <a:r>
+              <a:rPr sz="1900" b="0">
+                <a:solidFill>
+                  <a:srgbClr val="131E19"/>
+                </a:solidFill>
+                <a:latin typeface="Helvetica Neue"/>
+              </a:rPr>
+              <a:t>Tizim buni darhol ushladi: bunday qiymat odamda bo'lmaydi,</a:t>
+            </a:r>
+          </a:p>
+          <a:p>
+            <a:pPr algn="l">
+              <a:spcAft>
+                <a:spcPts val="700"/>
+              </a:spcAft>
+            </a:pPr>
+            <a:r>
+              <a:rPr sz="1900" b="0">
+                <a:solidFill>
+                  <a:srgbClr val="131E19"/>
+                </a:solidFill>
+                <a:latin typeface="Helvetica Neue"/>
+              </a:rPr>
+              <a:t>demak transkripsiya xatosi.</a:t>
+            </a:r>
+          </a:p>
+          <a:p>
+            <a:pPr algn="l">
+              <a:spcAft>
+                <a:spcPts val="700"/>
+              </a:spcAft>
+            </a:pPr>
+            <a:r>
+              <a:rPr sz="1900" b="0">
+                <a:solidFill>
+                  <a:srgbClr val="131E19"/>
+                </a:solidFill>
+                <a:latin typeface="Helvetica Neue"/>
+              </a:rPr>
+              <a:t/>
+            </a:r>
+          </a:p>
+          <a:p>
+            <a:pPr algn="l">
+              <a:spcAft>
+                <a:spcPts val="700"/>
+              </a:spcAft>
+            </a:pPr>
+            <a:r>
+              <a:rPr sz="1900" b="0">
+                <a:solidFill>
+                  <a:srgbClr val="131E19"/>
+                </a:solidFill>
+                <a:latin typeface="Helvetica Neue"/>
+              </a:rPr>
+              <a:t>Shu formada faqat bitta maydon bor, tizim uni topdi va</a:t>
+            </a:r>
+          </a:p>
+          <a:p>
+            <a:pPr algn="l">
+              <a:spcAft>
+                <a:spcPts val="700"/>
+              </a:spcAft>
+            </a:pPr>
+            <a:r>
+              <a:rPr sz="1900" b="0">
+                <a:solidFill>
+                  <a:srgbClr val="131E19"/>
+                </a:solidFill>
+                <a:latin typeface="Helvetica Neue"/>
+              </a:rPr>
+              <a:t>belgiladi. Qolgan qiymatlar OpenEMR'ning boshqa</a:t>
+            </a:r>
+          </a:p>
+          <a:p>
+            <a:pPr algn="l">
+              <a:spcAft>
+                <a:spcPts val="700"/>
+              </a:spcAft>
+            </a:pPr>
+            <a:r>
+              <a:rPr sz="1900" b="0">
+                <a:solidFill>
+                  <a:srgbClr val="131E19"/>
+                </a:solidFill>
+                <a:latin typeface="Helvetica Neue"/>
+              </a:rPr>
+              <a:t>formalariga tegishli.</a:t>
+            </a:r>
+          </a:p>
+        </p:txBody>
+      </p:sp>
+      <p:sp>
+        <p:nvSpPr>
+          <p:cNvPr id="6" name="Rounded Rectangle 5"/>
+          <p:cNvSpPr/>
+          <p:nvPr/>
+        </p:nvSpPr>
+        <p:spPr>
+          <a:xfrm>
+            <a:off x="777240" y="5257800"/>
+            <a:ext cx="6583680" cy="1005840"/>
+          </a:xfrm>
+          <a:prstGeom prst="roundRect">
+            <a:avLst/>
+          </a:prstGeom>
+          <a:solidFill>
+            <a:srgbClr val="FFFFFF"/>
+          </a:solidFill>
+          <a:ln w="9525">
+            <a:solidFill>
+              <a:srgbClr val="D9E0DA"/>
+            </a:solidFill>
+          </a:ln>
+          <a:effectLst/>
+        </p:spPr>
+        <p:style>
+          <a:lnRef idx="1">
+            <a:schemeClr val="accent1"/>
+          </a:lnRef>
+          <a:fillRef idx="3">
+            <a:schemeClr val="accent1"/>
+          </a:fillRef>
+          <a:effectRef idx="2">
+            <a:schemeClr val="accent1"/>
+          </a:effectRef>
+          <a:fontRef idx="minor">
+            <a:schemeClr val="lt1"/>
+          </a:fontRef>
+        </p:style>
+        <p:txBody>
+          <a:bodyPr rtlCol="0" anchor="ctr"/>
+          <a:lstStyle/>
+          <a:p>
+            <a:pPr algn="ctr"/>
+          </a:p>
+        </p:txBody>
+      </p:sp>
+      <p:sp>
+        <p:nvSpPr>
+          <p:cNvPr id="7" name="Rounded Rectangle 6"/>
+          <p:cNvSpPr/>
+          <p:nvPr/>
+        </p:nvSpPr>
+        <p:spPr>
+          <a:xfrm>
+            <a:off x="777240" y="5257800"/>
+            <a:ext cx="64008" cy="1005840"/>
+          </a:xfrm>
+          <a:prstGeom prst="roundRect">
+            <a:avLst/>
+          </a:prstGeom>
+          <a:solidFill>
+            <a:srgbClr val="A05007"/>
+          </a:solidFill>
+          <a:ln>
+            <a:noFill/>
+          </a:ln>
+          <a:effectLst/>
+        </p:spPr>
+        <p:style>
+          <a:lnRef idx="1">
+            <a:schemeClr val="accent1"/>
+          </a:lnRef>
+          <a:fillRef idx="3">
+            <a:schemeClr val="accent1"/>
+          </a:fillRef>
+          <a:effectRef idx="2">
+            <a:schemeClr val="accent1"/>
+          </a:effectRef>
+          <a:fontRef idx="minor">
+            <a:schemeClr val="lt1"/>
+          </a:fontRef>
+        </p:style>
+        <p:txBody>
+          <a:bodyPr rtlCol="0" anchor="ctr"/>
+          <a:lstStyle/>
+          <a:p>
+            <a:pPr algn="ctr"/>
+          </a:p>
+        </p:txBody>
+      </p:sp>
+      <p:sp>
+        <p:nvSpPr>
+          <p:cNvPr id="8" name="TextBox 7"/>
+          <p:cNvSpPr txBox="1"/>
+          <p:nvPr/>
+        </p:nvSpPr>
+        <p:spPr>
+          <a:xfrm>
+            <a:off x="1143000" y="5440680"/>
+            <a:ext cx="6035040" cy="731520"/>
+          </a:xfrm>
+          <a:prstGeom prst="rect">
+            <a:avLst/>
+          </a:prstGeom>
+          <a:noFill/>
+        </p:spPr>
+        <p:txBody>
+          <a:bodyPr wrap="square" lIns="0" rIns="0" tIns="0" bIns="0">
+            <a:spAutoFit/>
+          </a:bodyPr>
+          <a:lstStyle/>
+          <a:p>
+            <a:pPr algn="l">
+              <a:spcAft>
+                <a:spcPts val="700"/>
+              </a:spcAft>
+            </a:pPr>
+            <a:r>
+              <a:rPr sz="1500" b="0">
+                <a:solidFill>
+                  <a:srgbClr val="A05007"/>
+                </a:solidFill>
+                <a:latin typeface="Helvetica Neue"/>
+              </a:rPr>
+              <a:t>Ana shu joyda tizim shunchaki yozib qo'ymaydi. O'ylaydi va</a:t>
+            </a:r>
+          </a:p>
+          <a:p>
+            <a:pPr algn="l">
+              <a:spcAft>
+                <a:spcPts val="700"/>
+              </a:spcAft>
+            </a:pPr>
+            <a:r>
+              <a:rPr sz="1500" b="0">
+                <a:solidFill>
+                  <a:srgbClr val="A05007"/>
+                </a:solidFill>
+                <a:latin typeface="Helvetica Neue"/>
+              </a:rPr>
+              <a:t>shubhalansa shifokorni ogohlantiradi.</a:t>
+            </a:r>
+          </a:p>
+        </p:txBody>
+      </p:sp>
+      <p:sp>
+        <p:nvSpPr>
+          <p:cNvPr id="9" name="Rounded Rectangle 8"/>
+          <p:cNvSpPr/>
+          <p:nvPr/>
+        </p:nvSpPr>
+        <p:spPr>
+          <a:xfrm>
+            <a:off x="7770621" y="1691640"/>
+            <a:ext cx="3569717" cy="4846320"/>
+          </a:xfrm>
+          <a:prstGeom prst="roundRect">
+            <a:avLst/>
+          </a:prstGeom>
+          <a:solidFill>
+            <a:srgbClr val="FFFFFF"/>
+          </a:solidFill>
+          <a:ln w="9525">
+            <a:solidFill>
+              <a:srgbClr val="D9E0DA"/>
+            </a:solidFill>
+          </a:ln>
+          <a:effectLst/>
+        </p:spPr>
+        <p:style>
+          <a:lnRef idx="1">
+            <a:schemeClr val="accent1"/>
+          </a:lnRef>
+          <a:fillRef idx="3">
+            <a:schemeClr val="accent1"/>
+          </a:fillRef>
+          <a:effectRef idx="2">
+            <a:schemeClr val="accent1"/>
+          </a:effectRef>
+          <a:fontRef idx="minor">
+            <a:schemeClr val="lt1"/>
+          </a:fontRef>
+        </p:style>
+        <p:txBody>
+          <a:bodyPr rtlCol="0" anchor="ctr"/>
+          <a:lstStyle/>
+          <a:p>
+            <a:pPr algn="ctr"/>
           </a:p>
         </p:txBody>
       </p:sp>
       <p:pic>
         <p:nvPicPr>
-          <p:cNvPr id="5" name="Picture 4" descr="5-dori-tuzatish.png"/>
+          <p:cNvPr id="10" name="Picture 9" descr="ekran-natija.png"/>
           <p:cNvPicPr>
             <a:picLocks noChangeAspect="1"/>
           </p:cNvPicPr>
@@ -4496,8 +4909,8 @@
         </p:blipFill>
         <p:spPr>
           <a:xfrm>
-            <a:off x="2053508" y="2011680"/>
-            <a:ext cx="8054502" cy="4206240"/>
+            <a:off x="7816341" y="1737360"/>
+            <a:ext cx="3478277" cy="4754880"/>
           </a:xfrm>
           <a:prstGeom prst="rect">
             <a:avLst/>
@@ -4574,7 +4987,7 @@
         </p:nvSpPr>
         <p:spPr>
           <a:xfrm>
-            <a:off x="777240" y="566928"/>
+            <a:off x="777240" y="548640"/>
             <a:ext cx="10607040" cy="822960"/>
           </a:xfrm>
           <a:prstGeom prst="rect">
@@ -4594,117 +5007,27 @@
               </a:spcAft>
             </a:pPr>
             <a:r>
-              <a:rPr sz="3300" b="1">
+              <a:rPr sz="3200" b="1">
                 <a:solidFill>
                   <a:srgbClr val="131E19"/>
                 </a:solidFill>
                 <a:latin typeface="Helvetica Neue"/>
               </a:rPr>
-              <a:t>Nega shunday qurdim</a:t>
-            </a:r>
-          </a:p>
-        </p:txBody>
-      </p:sp>
-      <p:sp>
-        <p:nvSpPr>
-          <p:cNvPr id="4" name="Rounded Rectangle 3"/>
-          <p:cNvSpPr/>
-          <p:nvPr/>
-        </p:nvSpPr>
-        <p:spPr>
-          <a:xfrm>
-            <a:off x="777240" y="2148840"/>
-            <a:ext cx="10607040" cy="1143000"/>
-          </a:xfrm>
-          <a:prstGeom prst="roundRect">
-            <a:avLst/>
-          </a:prstGeom>
-          <a:solidFill>
-            <a:srgbClr val="FFFFFF"/>
-          </a:solidFill>
-          <a:ln w="9525">
-            <a:solidFill>
-              <a:srgbClr val="D9E0DA"/>
-            </a:solidFill>
-          </a:ln>
-          <a:effectLst/>
-        </p:spPr>
-        <p:style>
-          <a:lnRef idx="1">
-            <a:schemeClr val="accent1"/>
-          </a:lnRef>
-          <a:fillRef idx="3">
-            <a:schemeClr val="accent1"/>
-          </a:fillRef>
-          <a:effectRef idx="2">
-            <a:schemeClr val="accent1"/>
-          </a:effectRef>
-          <a:fontRef idx="minor">
-            <a:schemeClr val="lt1"/>
-          </a:fontRef>
-        </p:style>
-        <p:txBody>
-          <a:bodyPr rtlCol="0" anchor="ctr"/>
-          <a:lstStyle/>
-          <a:p>
-            <a:pPr algn="ctr"/>
-          </a:p>
-        </p:txBody>
-      </p:sp>
-      <p:sp>
-        <p:nvSpPr>
-          <p:cNvPr id="5" name="Rounded Rectangle 4"/>
-          <p:cNvSpPr/>
-          <p:nvPr/>
-        </p:nvSpPr>
-        <p:spPr>
-          <a:xfrm>
-            <a:off x="777240" y="2148840"/>
-            <a:ext cx="64008" cy="1143000"/>
-          </a:xfrm>
-          <a:prstGeom prst="roundRect">
-            <a:avLst/>
-          </a:prstGeom>
-          <a:solidFill>
-            <a:srgbClr val="0E6B58"/>
-          </a:solidFill>
-          <a:ln>
-            <a:noFill/>
-          </a:ln>
-          <a:effectLst/>
-        </p:spPr>
-        <p:style>
-          <a:lnRef idx="1">
-            <a:schemeClr val="accent1"/>
-          </a:lnRef>
-          <a:fillRef idx="3">
-            <a:schemeClr val="accent1"/>
-          </a:fillRef>
-          <a:effectRef idx="2">
-            <a:schemeClr val="accent1"/>
-          </a:effectRef>
-          <a:fontRef idx="minor">
-            <a:schemeClr val="lt1"/>
-          </a:fontRef>
-        </p:style>
-        <p:txBody>
-          <a:bodyPr rtlCol="0" anchor="ctr"/>
-          <a:lstStyle/>
-          <a:p>
-            <a:pPr algn="ctr"/>
-          </a:p>
-        </p:txBody>
-      </p:sp>
-      <p:sp>
-        <p:nvSpPr>
-          <p:cNvPr id="6" name="TextBox 5"/>
+              <a:t>Eng qiyin masala: dori nomlari</a:t>
+            </a:r>
+          </a:p>
+        </p:txBody>
+      </p:sp>
+      <p:sp>
+        <p:nvSpPr>
+          <p:cNvPr id="4" name="TextBox 3"/>
           <p:cNvSpPr txBox="1"/>
           <p:nvPr/>
         </p:nvSpPr>
         <p:spPr>
           <a:xfrm>
-            <a:off x="1115568" y="2313432"/>
-            <a:ext cx="10058400" cy="365760"/>
+            <a:off x="777240" y="1280160"/>
+            <a:ext cx="10607040" cy="548640"/>
           </a:xfrm>
           <a:prstGeom prst="rect">
             <a:avLst/>
@@ -4723,431 +5046,41 @@
               </a:spcAft>
             </a:pPr>
             <a:r>
-              <a:rPr sz="2000" b="1">
-                <a:solidFill>
-                  <a:srgbClr val="131E19"/>
+              <a:rPr sz="1600" b="0">
+                <a:solidFill>
+                  <a:srgbClr val="6E7D76"/>
                 </a:solidFill>
                 <a:latin typeface="Helvetica Neue"/>
               </a:rPr>
-              <a:t>Bulut o'rniga lokal</a:t>
-            </a:r>
-          </a:p>
-        </p:txBody>
-      </p:sp>
-      <p:sp>
-        <p:nvSpPr>
-          <p:cNvPr id="7" name="TextBox 6"/>
-          <p:cNvSpPr txBox="1"/>
-          <p:nvPr/>
-        </p:nvSpPr>
-        <p:spPr>
-          <a:xfrm>
-            <a:off x="1115568" y="2752344"/>
-            <a:ext cx="10058400" cy="457200"/>
+              <a:t>Modelni qayta o'qitish oylab vaqt olardi. Dekoderni sozlab hal qildim.</a:t>
+            </a:r>
+          </a:p>
+        </p:txBody>
+      </p:sp>
+      <p:pic>
+        <p:nvPicPr>
+          <p:cNvPr id="5" name="Picture 4" descr="5-dori-tuzatish.png"/>
+          <p:cNvPicPr>
+            <a:picLocks noChangeAspect="1"/>
+          </p:cNvPicPr>
+          <p:nvPr/>
+        </p:nvPicPr>
+        <p:blipFill>
+          <a:blip r:embed="rId2"/>
+          <a:stretch>
+            <a:fillRect/>
+          </a:stretch>
+        </p:blipFill>
+        <p:spPr>
+          <a:xfrm>
+            <a:off x="2053508" y="1965960"/>
+            <a:ext cx="8054502" cy="4206240"/>
           </a:xfrm>
           <a:prstGeom prst="rect">
             <a:avLst/>
           </a:prstGeom>
-          <a:noFill/>
-        </p:spPr>
-        <p:txBody>
-          <a:bodyPr wrap="square" lIns="0" rIns="0" tIns="0" bIns="0">
-            <a:spAutoFit/>
-          </a:bodyPr>
-          <a:lstStyle/>
-          <a:p>
-            <a:pPr algn="l">
-              <a:spcAft>
-                <a:spcPts val="700"/>
-              </a:spcAft>
-            </a:pPr>
-            <a:r>
-              <a:rPr sz="1500" b="0">
-                <a:solidFill>
-                  <a:srgbClr val="6E7D76"/>
-                </a:solidFill>
-                <a:latin typeface="Helvetica Neue"/>
-              </a:rPr>
-              <a:t>Bulutli xizmatlar biroz aniqroq tanirdi, lekin bemor ovozi tashqariga chiqardi.</a:t>
-            </a:r>
-          </a:p>
-        </p:txBody>
-      </p:sp>
-      <p:sp>
-        <p:nvSpPr>
-          <p:cNvPr id="8" name="Rounded Rectangle 7"/>
-          <p:cNvSpPr/>
-          <p:nvPr/>
-        </p:nvSpPr>
-        <p:spPr>
-          <a:xfrm>
-            <a:off x="777240" y="3520440"/>
-            <a:ext cx="10607040" cy="1143000"/>
-          </a:xfrm>
-          <a:prstGeom prst="roundRect">
-            <a:avLst/>
-          </a:prstGeom>
-          <a:solidFill>
-            <a:srgbClr val="FFFFFF"/>
-          </a:solidFill>
-          <a:ln w="9525">
-            <a:solidFill>
-              <a:srgbClr val="D9E0DA"/>
-            </a:solidFill>
-          </a:ln>
-          <a:effectLst/>
-        </p:spPr>
-        <p:style>
-          <a:lnRef idx="1">
-            <a:schemeClr val="accent1"/>
-          </a:lnRef>
-          <a:fillRef idx="3">
-            <a:schemeClr val="accent1"/>
-          </a:fillRef>
-          <a:effectRef idx="2">
-            <a:schemeClr val="accent1"/>
-          </a:effectRef>
-          <a:fontRef idx="minor">
-            <a:schemeClr val="lt1"/>
-          </a:fontRef>
-        </p:style>
-        <p:txBody>
-          <a:bodyPr rtlCol="0" anchor="ctr"/>
-          <a:lstStyle/>
-          <a:p>
-            <a:pPr algn="ctr"/>
-          </a:p>
-        </p:txBody>
-      </p:sp>
-      <p:sp>
-        <p:nvSpPr>
-          <p:cNvPr id="9" name="Rounded Rectangle 8"/>
-          <p:cNvSpPr/>
-          <p:nvPr/>
-        </p:nvSpPr>
-        <p:spPr>
-          <a:xfrm>
-            <a:off x="777240" y="3520440"/>
-            <a:ext cx="64008" cy="1143000"/>
-          </a:xfrm>
-          <a:prstGeom prst="roundRect">
-            <a:avLst/>
-          </a:prstGeom>
-          <a:solidFill>
-            <a:srgbClr val="0E6B58"/>
-          </a:solidFill>
-          <a:ln>
-            <a:noFill/>
-          </a:ln>
-          <a:effectLst/>
-        </p:spPr>
-        <p:style>
-          <a:lnRef idx="1">
-            <a:schemeClr val="accent1"/>
-          </a:lnRef>
-          <a:fillRef idx="3">
-            <a:schemeClr val="accent1"/>
-          </a:fillRef>
-          <a:effectRef idx="2">
-            <a:schemeClr val="accent1"/>
-          </a:effectRef>
-          <a:fontRef idx="minor">
-            <a:schemeClr val="lt1"/>
-          </a:fontRef>
-        </p:style>
-        <p:txBody>
-          <a:bodyPr rtlCol="0" anchor="ctr"/>
-          <a:lstStyle/>
-          <a:p>
-            <a:pPr algn="ctr"/>
-          </a:p>
-        </p:txBody>
-      </p:sp>
-      <p:sp>
-        <p:nvSpPr>
-          <p:cNvPr id="10" name="TextBox 9"/>
-          <p:cNvSpPr txBox="1"/>
-          <p:nvPr/>
-        </p:nvSpPr>
-        <p:spPr>
-          <a:xfrm>
-            <a:off x="1115568" y="3685032"/>
-            <a:ext cx="10058400" cy="365760"/>
-          </a:xfrm>
-          <a:prstGeom prst="rect">
-            <a:avLst/>
-          </a:prstGeom>
-          <a:noFill/>
-        </p:spPr>
-        <p:txBody>
-          <a:bodyPr wrap="square" lIns="0" rIns="0" tIns="0" bIns="0">
-            <a:spAutoFit/>
-          </a:bodyPr>
-          <a:lstStyle/>
-          <a:p>
-            <a:pPr algn="l">
-              <a:spcAft>
-                <a:spcPts val="700"/>
-              </a:spcAft>
-            </a:pPr>
-            <a:r>
-              <a:rPr sz="2000" b="1">
-                <a:solidFill>
-                  <a:srgbClr val="131E19"/>
-                </a:solidFill>
-                <a:latin typeface="Helvetica Neue"/>
-              </a:rPr>
-              <a:t>Qayta o'qitish o'rniga sozlash</a:t>
-            </a:r>
-          </a:p>
-        </p:txBody>
-      </p:sp>
-      <p:sp>
-        <p:nvSpPr>
-          <p:cNvPr id="11" name="TextBox 10"/>
-          <p:cNvSpPr txBox="1"/>
-          <p:nvPr/>
-        </p:nvSpPr>
-        <p:spPr>
-          <a:xfrm>
-            <a:off x="1115568" y="4123944"/>
-            <a:ext cx="10058400" cy="457200"/>
-          </a:xfrm>
-          <a:prstGeom prst="rect">
-            <a:avLst/>
-          </a:prstGeom>
-          <a:noFill/>
-        </p:spPr>
-        <p:txBody>
-          <a:bodyPr wrap="square" lIns="0" rIns="0" tIns="0" bIns="0">
-            <a:spAutoFit/>
-          </a:bodyPr>
-          <a:lstStyle/>
-          <a:p>
-            <a:pPr algn="l">
-              <a:spcAft>
-                <a:spcPts val="700"/>
-              </a:spcAft>
-            </a:pPr>
-            <a:r>
-              <a:rPr sz="1500" b="0">
-                <a:solidFill>
-                  <a:srgbClr val="6E7D76"/>
-                </a:solidFill>
-                <a:latin typeface="Helvetica Neue"/>
-              </a:rPr>
-              <a:t>O'qitish oylab vaqt va katta ma'lumot talab qilardi. Sozlash bilan 62 dan 88 foizga chiqdim.</a:t>
-            </a:r>
-          </a:p>
-        </p:txBody>
-      </p:sp>
-      <p:sp>
-        <p:nvSpPr>
-          <p:cNvPr id="12" name="Rounded Rectangle 11"/>
-          <p:cNvSpPr/>
-          <p:nvPr/>
-        </p:nvSpPr>
-        <p:spPr>
-          <a:xfrm>
-            <a:off x="777240" y="4892040"/>
-            <a:ext cx="10607040" cy="1143000"/>
-          </a:xfrm>
-          <a:prstGeom prst="roundRect">
-            <a:avLst/>
-          </a:prstGeom>
-          <a:solidFill>
-            <a:srgbClr val="FFFFFF"/>
-          </a:solidFill>
-          <a:ln w="9525">
-            <a:solidFill>
-              <a:srgbClr val="D9E0DA"/>
-            </a:solidFill>
-          </a:ln>
-          <a:effectLst/>
-        </p:spPr>
-        <p:style>
-          <a:lnRef idx="1">
-            <a:schemeClr val="accent1"/>
-          </a:lnRef>
-          <a:fillRef idx="3">
-            <a:schemeClr val="accent1"/>
-          </a:fillRef>
-          <a:effectRef idx="2">
-            <a:schemeClr val="accent1"/>
-          </a:effectRef>
-          <a:fontRef idx="minor">
-            <a:schemeClr val="lt1"/>
-          </a:fontRef>
-        </p:style>
-        <p:txBody>
-          <a:bodyPr rtlCol="0" anchor="ctr"/>
-          <a:lstStyle/>
-          <a:p>
-            <a:pPr algn="ctr"/>
-          </a:p>
-        </p:txBody>
-      </p:sp>
-      <p:sp>
-        <p:nvSpPr>
-          <p:cNvPr id="13" name="Rounded Rectangle 12"/>
-          <p:cNvSpPr/>
-          <p:nvPr/>
-        </p:nvSpPr>
-        <p:spPr>
-          <a:xfrm>
-            <a:off x="777240" y="4892040"/>
-            <a:ext cx="64008" cy="1143000"/>
-          </a:xfrm>
-          <a:prstGeom prst="roundRect">
-            <a:avLst/>
-          </a:prstGeom>
-          <a:solidFill>
-            <a:srgbClr val="0E6B58"/>
-          </a:solidFill>
-          <a:ln>
-            <a:noFill/>
-          </a:ln>
-          <a:effectLst/>
-        </p:spPr>
-        <p:style>
-          <a:lnRef idx="1">
-            <a:schemeClr val="accent1"/>
-          </a:lnRef>
-          <a:fillRef idx="3">
-            <a:schemeClr val="accent1"/>
-          </a:fillRef>
-          <a:effectRef idx="2">
-            <a:schemeClr val="accent1"/>
-          </a:effectRef>
-          <a:fontRef idx="minor">
-            <a:schemeClr val="lt1"/>
-          </a:fontRef>
-        </p:style>
-        <p:txBody>
-          <a:bodyPr rtlCol="0" anchor="ctr"/>
-          <a:lstStyle/>
-          <a:p>
-            <a:pPr algn="ctr"/>
-          </a:p>
-        </p:txBody>
-      </p:sp>
-      <p:sp>
-        <p:nvSpPr>
-          <p:cNvPr id="14" name="TextBox 13"/>
-          <p:cNvSpPr txBox="1"/>
-          <p:nvPr/>
-        </p:nvSpPr>
-        <p:spPr>
-          <a:xfrm>
-            <a:off x="1115568" y="5056631"/>
-            <a:ext cx="10058400" cy="365760"/>
-          </a:xfrm>
-          <a:prstGeom prst="rect">
-            <a:avLst/>
-          </a:prstGeom>
-          <a:noFill/>
-        </p:spPr>
-        <p:txBody>
-          <a:bodyPr wrap="square" lIns="0" rIns="0" tIns="0" bIns="0">
-            <a:spAutoFit/>
-          </a:bodyPr>
-          <a:lstStyle/>
-          <a:p>
-            <a:pPr algn="l">
-              <a:spcAft>
-                <a:spcPts val="700"/>
-              </a:spcAft>
-            </a:pPr>
-            <a:r>
-              <a:rPr sz="2000" b="1">
-                <a:solidFill>
-                  <a:srgbClr val="131E19"/>
-                </a:solidFill>
-                <a:latin typeface="Helvetica Neue"/>
-              </a:rPr>
-              <a:t>Til modeli o'rniga oddiy usul</a:t>
-            </a:r>
-          </a:p>
-        </p:txBody>
-      </p:sp>
-      <p:sp>
-        <p:nvSpPr>
-          <p:cNvPr id="15" name="TextBox 14"/>
-          <p:cNvSpPr txBox="1"/>
-          <p:nvPr/>
-        </p:nvSpPr>
-        <p:spPr>
-          <a:xfrm>
-            <a:off x="1115568" y="5495544"/>
-            <a:ext cx="10058400" cy="457200"/>
-          </a:xfrm>
-          <a:prstGeom prst="rect">
-            <a:avLst/>
-          </a:prstGeom>
-          <a:noFill/>
-        </p:spPr>
-        <p:txBody>
-          <a:bodyPr wrap="square" lIns="0" rIns="0" tIns="0" bIns="0">
-            <a:spAutoFit/>
-          </a:bodyPr>
-          <a:lstStyle/>
-          <a:p>
-            <a:pPr algn="l">
-              <a:spcAft>
-                <a:spcPts val="700"/>
-              </a:spcAft>
-            </a:pPr>
-            <a:r>
-              <a:rPr sz="1500" b="0">
-                <a:solidFill>
-                  <a:srgbClr val="6E7D76"/>
-                </a:solidFill>
-                <a:latin typeface="Helvetica Neue"/>
-              </a:rPr>
-              <a:t>Tashxis kodiga til modeli qo'yish mumkin edi. Oddiy usul tezroq ishladi va qaysi so'z sabab bo'lganini ko'rsatadi.</a:t>
-            </a:r>
-          </a:p>
-        </p:txBody>
-      </p:sp>
-      <p:sp>
-        <p:nvSpPr>
-          <p:cNvPr id="16" name="TextBox 15"/>
-          <p:cNvSpPr txBox="1"/>
-          <p:nvPr/>
-        </p:nvSpPr>
-        <p:spPr>
-          <a:xfrm>
-            <a:off x="777240" y="6355080"/>
-            <a:ext cx="10607040" cy="365760"/>
-          </a:xfrm>
-          <a:prstGeom prst="rect">
-            <a:avLst/>
-          </a:prstGeom>
-          <a:noFill/>
-        </p:spPr>
-        <p:txBody>
-          <a:bodyPr wrap="square" lIns="0" rIns="0" tIns="0" bIns="0">
-            <a:spAutoFit/>
-          </a:bodyPr>
-          <a:lstStyle/>
-          <a:p>
-            <a:pPr algn="l">
-              <a:spcAft>
-                <a:spcPts val="700"/>
-              </a:spcAft>
-            </a:pPr>
-            <a:r>
-              <a:rPr sz="1500" b="0">
-                <a:solidFill>
-                  <a:srgbClr val="A05007"/>
-                </a:solidFill>
-                <a:latin typeface="Helvetica Neue"/>
-              </a:rPr>
-              <a:t>Har bir tanlovda tezlik va tushuntirib bera olish muhimroq bo'ldi.</a:t>
-            </a:r>
-          </a:p>
-        </p:txBody>
-      </p:sp>
+        </p:spPr>
+      </p:pic>
     </p:spTree>
   </p:cSld>
   <p:clrMapOvr>
@@ -5218,7 +5151,7 @@
         </p:nvSpPr>
         <p:spPr>
           <a:xfrm>
-            <a:off x="777240" y="566928"/>
+            <a:off x="777240" y="548640"/>
             <a:ext cx="10607040" cy="822960"/>
           </a:xfrm>
           <a:prstGeom prst="rect">
@@ -5238,7 +5171,651 @@
               </a:spcAft>
             </a:pPr>
             <a:r>
-              <a:rPr sz="3300" b="1">
+              <a:rPr sz="3200" b="1">
+                <a:solidFill>
+                  <a:srgbClr val="131E19"/>
+                </a:solidFill>
+                <a:latin typeface="Helvetica Neue"/>
+              </a:rPr>
+              <a:t>Nega shunday qurdim</a:t>
+            </a:r>
+          </a:p>
+        </p:txBody>
+      </p:sp>
+      <p:sp>
+        <p:nvSpPr>
+          <p:cNvPr id="4" name="Rounded Rectangle 3"/>
+          <p:cNvSpPr/>
+          <p:nvPr/>
+        </p:nvSpPr>
+        <p:spPr>
+          <a:xfrm>
+            <a:off x="777240" y="2148840"/>
+            <a:ext cx="10607040" cy="1143000"/>
+          </a:xfrm>
+          <a:prstGeom prst="roundRect">
+            <a:avLst/>
+          </a:prstGeom>
+          <a:solidFill>
+            <a:srgbClr val="FFFFFF"/>
+          </a:solidFill>
+          <a:ln w="9525">
+            <a:solidFill>
+              <a:srgbClr val="D9E0DA"/>
+            </a:solidFill>
+          </a:ln>
+          <a:effectLst/>
+        </p:spPr>
+        <p:style>
+          <a:lnRef idx="1">
+            <a:schemeClr val="accent1"/>
+          </a:lnRef>
+          <a:fillRef idx="3">
+            <a:schemeClr val="accent1"/>
+          </a:fillRef>
+          <a:effectRef idx="2">
+            <a:schemeClr val="accent1"/>
+          </a:effectRef>
+          <a:fontRef idx="minor">
+            <a:schemeClr val="lt1"/>
+          </a:fontRef>
+        </p:style>
+        <p:txBody>
+          <a:bodyPr rtlCol="0" anchor="ctr"/>
+          <a:lstStyle/>
+          <a:p>
+            <a:pPr algn="ctr"/>
+          </a:p>
+        </p:txBody>
+      </p:sp>
+      <p:sp>
+        <p:nvSpPr>
+          <p:cNvPr id="5" name="Rounded Rectangle 4"/>
+          <p:cNvSpPr/>
+          <p:nvPr/>
+        </p:nvSpPr>
+        <p:spPr>
+          <a:xfrm>
+            <a:off x="777240" y="2148840"/>
+            <a:ext cx="64008" cy="1143000"/>
+          </a:xfrm>
+          <a:prstGeom prst="roundRect">
+            <a:avLst/>
+          </a:prstGeom>
+          <a:solidFill>
+            <a:srgbClr val="0E6B58"/>
+          </a:solidFill>
+          <a:ln>
+            <a:noFill/>
+          </a:ln>
+          <a:effectLst/>
+        </p:spPr>
+        <p:style>
+          <a:lnRef idx="1">
+            <a:schemeClr val="accent1"/>
+          </a:lnRef>
+          <a:fillRef idx="3">
+            <a:schemeClr val="accent1"/>
+          </a:fillRef>
+          <a:effectRef idx="2">
+            <a:schemeClr val="accent1"/>
+          </a:effectRef>
+          <a:fontRef idx="minor">
+            <a:schemeClr val="lt1"/>
+          </a:fontRef>
+        </p:style>
+        <p:txBody>
+          <a:bodyPr rtlCol="0" anchor="ctr"/>
+          <a:lstStyle/>
+          <a:p>
+            <a:pPr algn="ctr"/>
+          </a:p>
+        </p:txBody>
+      </p:sp>
+      <p:sp>
+        <p:nvSpPr>
+          <p:cNvPr id="6" name="TextBox 5"/>
+          <p:cNvSpPr txBox="1"/>
+          <p:nvPr/>
+        </p:nvSpPr>
+        <p:spPr>
+          <a:xfrm>
+            <a:off x="1115568" y="2313432"/>
+            <a:ext cx="10058400" cy="365760"/>
+          </a:xfrm>
+          <a:prstGeom prst="rect">
+            <a:avLst/>
+          </a:prstGeom>
+          <a:noFill/>
+        </p:spPr>
+        <p:txBody>
+          <a:bodyPr wrap="square" lIns="0" rIns="0" tIns="0" bIns="0">
+            <a:spAutoFit/>
+          </a:bodyPr>
+          <a:lstStyle/>
+          <a:p>
+            <a:pPr algn="l">
+              <a:spcAft>
+                <a:spcPts val="700"/>
+              </a:spcAft>
+            </a:pPr>
+            <a:r>
+              <a:rPr sz="2000" b="1">
+                <a:solidFill>
+                  <a:srgbClr val="131E19"/>
+                </a:solidFill>
+                <a:latin typeface="Helvetica Neue"/>
+              </a:rPr>
+              <a:t>Bulut o'rniga lokal</a:t>
+            </a:r>
+          </a:p>
+        </p:txBody>
+      </p:sp>
+      <p:sp>
+        <p:nvSpPr>
+          <p:cNvPr id="7" name="TextBox 6"/>
+          <p:cNvSpPr txBox="1"/>
+          <p:nvPr/>
+        </p:nvSpPr>
+        <p:spPr>
+          <a:xfrm>
+            <a:off x="1115568" y="2752344"/>
+            <a:ext cx="10058400" cy="457200"/>
+          </a:xfrm>
+          <a:prstGeom prst="rect">
+            <a:avLst/>
+          </a:prstGeom>
+          <a:noFill/>
+        </p:spPr>
+        <p:txBody>
+          <a:bodyPr wrap="square" lIns="0" rIns="0" tIns="0" bIns="0">
+            <a:spAutoFit/>
+          </a:bodyPr>
+          <a:lstStyle/>
+          <a:p>
+            <a:pPr algn="l">
+              <a:spcAft>
+                <a:spcPts val="700"/>
+              </a:spcAft>
+            </a:pPr>
+            <a:r>
+              <a:rPr sz="1500" b="0">
+                <a:solidFill>
+                  <a:srgbClr val="6E7D76"/>
+                </a:solidFill>
+                <a:latin typeface="Helvetica Neue"/>
+              </a:rPr>
+              <a:t>Bulutli xizmatlar biroz aniqroq tanirdi, lekin bemor ovozi tashqariga chiqardi.</a:t>
+            </a:r>
+          </a:p>
+        </p:txBody>
+      </p:sp>
+      <p:sp>
+        <p:nvSpPr>
+          <p:cNvPr id="8" name="Rounded Rectangle 7"/>
+          <p:cNvSpPr/>
+          <p:nvPr/>
+        </p:nvSpPr>
+        <p:spPr>
+          <a:xfrm>
+            <a:off x="777240" y="3520440"/>
+            <a:ext cx="10607040" cy="1143000"/>
+          </a:xfrm>
+          <a:prstGeom prst="roundRect">
+            <a:avLst/>
+          </a:prstGeom>
+          <a:solidFill>
+            <a:srgbClr val="FFFFFF"/>
+          </a:solidFill>
+          <a:ln w="9525">
+            <a:solidFill>
+              <a:srgbClr val="D9E0DA"/>
+            </a:solidFill>
+          </a:ln>
+          <a:effectLst/>
+        </p:spPr>
+        <p:style>
+          <a:lnRef idx="1">
+            <a:schemeClr val="accent1"/>
+          </a:lnRef>
+          <a:fillRef idx="3">
+            <a:schemeClr val="accent1"/>
+          </a:fillRef>
+          <a:effectRef idx="2">
+            <a:schemeClr val="accent1"/>
+          </a:effectRef>
+          <a:fontRef idx="minor">
+            <a:schemeClr val="lt1"/>
+          </a:fontRef>
+        </p:style>
+        <p:txBody>
+          <a:bodyPr rtlCol="0" anchor="ctr"/>
+          <a:lstStyle/>
+          <a:p>
+            <a:pPr algn="ctr"/>
+          </a:p>
+        </p:txBody>
+      </p:sp>
+      <p:sp>
+        <p:nvSpPr>
+          <p:cNvPr id="9" name="Rounded Rectangle 8"/>
+          <p:cNvSpPr/>
+          <p:nvPr/>
+        </p:nvSpPr>
+        <p:spPr>
+          <a:xfrm>
+            <a:off x="777240" y="3520440"/>
+            <a:ext cx="64008" cy="1143000"/>
+          </a:xfrm>
+          <a:prstGeom prst="roundRect">
+            <a:avLst/>
+          </a:prstGeom>
+          <a:solidFill>
+            <a:srgbClr val="0E6B58"/>
+          </a:solidFill>
+          <a:ln>
+            <a:noFill/>
+          </a:ln>
+          <a:effectLst/>
+        </p:spPr>
+        <p:style>
+          <a:lnRef idx="1">
+            <a:schemeClr val="accent1"/>
+          </a:lnRef>
+          <a:fillRef idx="3">
+            <a:schemeClr val="accent1"/>
+          </a:fillRef>
+          <a:effectRef idx="2">
+            <a:schemeClr val="accent1"/>
+          </a:effectRef>
+          <a:fontRef idx="minor">
+            <a:schemeClr val="lt1"/>
+          </a:fontRef>
+        </p:style>
+        <p:txBody>
+          <a:bodyPr rtlCol="0" anchor="ctr"/>
+          <a:lstStyle/>
+          <a:p>
+            <a:pPr algn="ctr"/>
+          </a:p>
+        </p:txBody>
+      </p:sp>
+      <p:sp>
+        <p:nvSpPr>
+          <p:cNvPr id="10" name="TextBox 9"/>
+          <p:cNvSpPr txBox="1"/>
+          <p:nvPr/>
+        </p:nvSpPr>
+        <p:spPr>
+          <a:xfrm>
+            <a:off x="1115568" y="3685032"/>
+            <a:ext cx="10058400" cy="365760"/>
+          </a:xfrm>
+          <a:prstGeom prst="rect">
+            <a:avLst/>
+          </a:prstGeom>
+          <a:noFill/>
+        </p:spPr>
+        <p:txBody>
+          <a:bodyPr wrap="square" lIns="0" rIns="0" tIns="0" bIns="0">
+            <a:spAutoFit/>
+          </a:bodyPr>
+          <a:lstStyle/>
+          <a:p>
+            <a:pPr algn="l">
+              <a:spcAft>
+                <a:spcPts val="700"/>
+              </a:spcAft>
+            </a:pPr>
+            <a:r>
+              <a:rPr sz="2000" b="1">
+                <a:solidFill>
+                  <a:srgbClr val="131E19"/>
+                </a:solidFill>
+                <a:latin typeface="Helvetica Neue"/>
+              </a:rPr>
+              <a:t>Qayta o'qitish o'rniga sozlash</a:t>
+            </a:r>
+          </a:p>
+        </p:txBody>
+      </p:sp>
+      <p:sp>
+        <p:nvSpPr>
+          <p:cNvPr id="11" name="TextBox 10"/>
+          <p:cNvSpPr txBox="1"/>
+          <p:nvPr/>
+        </p:nvSpPr>
+        <p:spPr>
+          <a:xfrm>
+            <a:off x="1115568" y="4123944"/>
+            <a:ext cx="10058400" cy="457200"/>
+          </a:xfrm>
+          <a:prstGeom prst="rect">
+            <a:avLst/>
+          </a:prstGeom>
+          <a:noFill/>
+        </p:spPr>
+        <p:txBody>
+          <a:bodyPr wrap="square" lIns="0" rIns="0" tIns="0" bIns="0">
+            <a:spAutoFit/>
+          </a:bodyPr>
+          <a:lstStyle/>
+          <a:p>
+            <a:pPr algn="l">
+              <a:spcAft>
+                <a:spcPts val="700"/>
+              </a:spcAft>
+            </a:pPr>
+            <a:r>
+              <a:rPr sz="1500" b="0">
+                <a:solidFill>
+                  <a:srgbClr val="6E7D76"/>
+                </a:solidFill>
+                <a:latin typeface="Helvetica Neue"/>
+              </a:rPr>
+              <a:t>O'qitish oylab vaqt va katta ma'lumot talab qilardi. Sozlash bilan 62 dan 88 foizga chiqdim.</a:t>
+            </a:r>
+          </a:p>
+        </p:txBody>
+      </p:sp>
+      <p:sp>
+        <p:nvSpPr>
+          <p:cNvPr id="12" name="Rounded Rectangle 11"/>
+          <p:cNvSpPr/>
+          <p:nvPr/>
+        </p:nvSpPr>
+        <p:spPr>
+          <a:xfrm>
+            <a:off x="777240" y="4892040"/>
+            <a:ext cx="10607040" cy="1143000"/>
+          </a:xfrm>
+          <a:prstGeom prst="roundRect">
+            <a:avLst/>
+          </a:prstGeom>
+          <a:solidFill>
+            <a:srgbClr val="FFFFFF"/>
+          </a:solidFill>
+          <a:ln w="9525">
+            <a:solidFill>
+              <a:srgbClr val="D9E0DA"/>
+            </a:solidFill>
+          </a:ln>
+          <a:effectLst/>
+        </p:spPr>
+        <p:style>
+          <a:lnRef idx="1">
+            <a:schemeClr val="accent1"/>
+          </a:lnRef>
+          <a:fillRef idx="3">
+            <a:schemeClr val="accent1"/>
+          </a:fillRef>
+          <a:effectRef idx="2">
+            <a:schemeClr val="accent1"/>
+          </a:effectRef>
+          <a:fontRef idx="minor">
+            <a:schemeClr val="lt1"/>
+          </a:fontRef>
+        </p:style>
+        <p:txBody>
+          <a:bodyPr rtlCol="0" anchor="ctr"/>
+          <a:lstStyle/>
+          <a:p>
+            <a:pPr algn="ctr"/>
+          </a:p>
+        </p:txBody>
+      </p:sp>
+      <p:sp>
+        <p:nvSpPr>
+          <p:cNvPr id="13" name="Rounded Rectangle 12"/>
+          <p:cNvSpPr/>
+          <p:nvPr/>
+        </p:nvSpPr>
+        <p:spPr>
+          <a:xfrm>
+            <a:off x="777240" y="4892040"/>
+            <a:ext cx="64008" cy="1143000"/>
+          </a:xfrm>
+          <a:prstGeom prst="roundRect">
+            <a:avLst/>
+          </a:prstGeom>
+          <a:solidFill>
+            <a:srgbClr val="0E6B58"/>
+          </a:solidFill>
+          <a:ln>
+            <a:noFill/>
+          </a:ln>
+          <a:effectLst/>
+        </p:spPr>
+        <p:style>
+          <a:lnRef idx="1">
+            <a:schemeClr val="accent1"/>
+          </a:lnRef>
+          <a:fillRef idx="3">
+            <a:schemeClr val="accent1"/>
+          </a:fillRef>
+          <a:effectRef idx="2">
+            <a:schemeClr val="accent1"/>
+          </a:effectRef>
+          <a:fontRef idx="minor">
+            <a:schemeClr val="lt1"/>
+          </a:fontRef>
+        </p:style>
+        <p:txBody>
+          <a:bodyPr rtlCol="0" anchor="ctr"/>
+          <a:lstStyle/>
+          <a:p>
+            <a:pPr algn="ctr"/>
+          </a:p>
+        </p:txBody>
+      </p:sp>
+      <p:sp>
+        <p:nvSpPr>
+          <p:cNvPr id="14" name="TextBox 13"/>
+          <p:cNvSpPr txBox="1"/>
+          <p:nvPr/>
+        </p:nvSpPr>
+        <p:spPr>
+          <a:xfrm>
+            <a:off x="1115568" y="5056631"/>
+            <a:ext cx="10058400" cy="365760"/>
+          </a:xfrm>
+          <a:prstGeom prst="rect">
+            <a:avLst/>
+          </a:prstGeom>
+          <a:noFill/>
+        </p:spPr>
+        <p:txBody>
+          <a:bodyPr wrap="square" lIns="0" rIns="0" tIns="0" bIns="0">
+            <a:spAutoFit/>
+          </a:bodyPr>
+          <a:lstStyle/>
+          <a:p>
+            <a:pPr algn="l">
+              <a:spcAft>
+                <a:spcPts val="700"/>
+              </a:spcAft>
+            </a:pPr>
+            <a:r>
+              <a:rPr sz="2000" b="1">
+                <a:solidFill>
+                  <a:srgbClr val="131E19"/>
+                </a:solidFill>
+                <a:latin typeface="Helvetica Neue"/>
+              </a:rPr>
+              <a:t>Til modeli o'rniga oddiy usul</a:t>
+            </a:r>
+          </a:p>
+        </p:txBody>
+      </p:sp>
+      <p:sp>
+        <p:nvSpPr>
+          <p:cNvPr id="15" name="TextBox 14"/>
+          <p:cNvSpPr txBox="1"/>
+          <p:nvPr/>
+        </p:nvSpPr>
+        <p:spPr>
+          <a:xfrm>
+            <a:off x="1115568" y="5495544"/>
+            <a:ext cx="10058400" cy="457200"/>
+          </a:xfrm>
+          <a:prstGeom prst="rect">
+            <a:avLst/>
+          </a:prstGeom>
+          <a:noFill/>
+        </p:spPr>
+        <p:txBody>
+          <a:bodyPr wrap="square" lIns="0" rIns="0" tIns="0" bIns="0">
+            <a:spAutoFit/>
+          </a:bodyPr>
+          <a:lstStyle/>
+          <a:p>
+            <a:pPr algn="l">
+              <a:spcAft>
+                <a:spcPts val="700"/>
+              </a:spcAft>
+            </a:pPr>
+            <a:r>
+              <a:rPr sz="1500" b="0">
+                <a:solidFill>
+                  <a:srgbClr val="6E7D76"/>
+                </a:solidFill>
+                <a:latin typeface="Helvetica Neue"/>
+              </a:rPr>
+              <a:t>Tashxis kodiga til modeli qo'yish mumkin edi. Oddiy usul tezroq ishladi va qaysi so'z sabab bo'lganini ko'rsatadi.</a:t>
+            </a:r>
+          </a:p>
+        </p:txBody>
+      </p:sp>
+      <p:sp>
+        <p:nvSpPr>
+          <p:cNvPr id="16" name="TextBox 15"/>
+          <p:cNvSpPr txBox="1"/>
+          <p:nvPr/>
+        </p:nvSpPr>
+        <p:spPr>
+          <a:xfrm>
+            <a:off x="777240" y="6355080"/>
+            <a:ext cx="10607040" cy="365760"/>
+          </a:xfrm>
+          <a:prstGeom prst="rect">
+            <a:avLst/>
+          </a:prstGeom>
+          <a:noFill/>
+        </p:spPr>
+        <p:txBody>
+          <a:bodyPr wrap="square" lIns="0" rIns="0" tIns="0" bIns="0">
+            <a:spAutoFit/>
+          </a:bodyPr>
+          <a:lstStyle/>
+          <a:p>
+            <a:pPr algn="l">
+              <a:spcAft>
+                <a:spcPts val="700"/>
+              </a:spcAft>
+            </a:pPr>
+            <a:r>
+              <a:rPr sz="1500" b="0">
+                <a:solidFill>
+                  <a:srgbClr val="A05007"/>
+                </a:solidFill>
+                <a:latin typeface="Helvetica Neue"/>
+              </a:rPr>
+              <a:t>Har bir tanlovda tezlik va tushuntirib bera olish muhimroq bo'ldi.</a:t>
+            </a:r>
+          </a:p>
+        </p:txBody>
+      </p:sp>
+    </p:spTree>
+  </p:cSld>
+  <p:clrMapOvr>
+    <a:masterClrMapping/>
+  </p:clrMapOvr>
+</p:sld>
+</file>
+
+<file path=ppt/slides/slide7.xml><?xml version="1.0" encoding="utf-8"?>
+<p:sld xmlns:a="http://schemas.openxmlformats.org/drawingml/2006/main" xmlns:p="http://schemas.openxmlformats.org/presentationml/2006/main" xmlns:r="http://schemas.openxmlformats.org/officeDocument/2006/relationships">
+  <p:cSld>
+    <p:spTree>
+      <p:nvGrpSpPr>
+        <p:cNvPr id="1" name=""/>
+        <p:cNvGrpSpPr/>
+        <p:nvPr/>
+      </p:nvGrpSpPr>
+      <p:grpSpPr/>
+      <p:sp>
+        <p:nvSpPr>
+          <p:cNvPr id="2" name="Rectangle 1"/>
+          <p:cNvSpPr/>
+          <p:nvPr/>
+        </p:nvSpPr>
+        <p:spPr>
+          <a:xfrm>
+            <a:off x="0" y="0"/>
+            <a:ext cx="12191695" cy="6858000"/>
+          </a:xfrm>
+          <a:prstGeom prst="rect">
+            <a:avLst/>
+          </a:prstGeom>
+          <a:solidFill>
+            <a:srgbClr val="F6F7F4"/>
+          </a:solidFill>
+          <a:ln>
+            <a:noFill/>
+          </a:ln>
+          <a:effectLst/>
+        </p:spPr>
+        <p:style>
+          <a:lnRef idx="1">
+            <a:schemeClr val="accent1"/>
+          </a:lnRef>
+          <a:fillRef idx="3">
+            <a:schemeClr val="accent1"/>
+          </a:fillRef>
+          <a:effectRef idx="2">
+            <a:schemeClr val="accent1"/>
+          </a:effectRef>
+          <a:fontRef idx="minor">
+            <a:schemeClr val="lt1"/>
+          </a:fontRef>
+        </p:style>
+        <p:txBody>
+          <a:bodyPr rtlCol="0" anchor="ctr"/>
+          <a:lstStyle/>
+          <a:p>
+            <a:pPr algn="ctr"/>
+          </a:p>
+        </p:txBody>
+      </p:sp>
+      <p:sp>
+        <p:nvSpPr>
+          <p:cNvPr id="3" name="TextBox 2"/>
+          <p:cNvSpPr txBox="1"/>
+          <p:nvPr/>
+        </p:nvSpPr>
+        <p:spPr>
+          <a:xfrm>
+            <a:off x="777240" y="548640"/>
+            <a:ext cx="10607040" cy="822960"/>
+          </a:xfrm>
+          <a:prstGeom prst="rect">
+            <a:avLst/>
+          </a:prstGeom>
+          <a:noFill/>
+        </p:spPr>
+        <p:txBody>
+          <a:bodyPr wrap="square" lIns="0" rIns="0" tIns="0" bIns="0">
+            <a:spAutoFit/>
+          </a:bodyPr>
+          <a:lstStyle/>
+          <a:p>
+            <a:pPr algn="l">
+              <a:spcAft>
+                <a:spcPts val="700"/>
+              </a:spcAft>
+            </a:pPr>
+            <a:r>
+              <a:rPr sz="3200" b="1">
                 <a:solidFill>
                   <a:srgbClr val="131E19"/>
                 </a:solidFill>
